--- a/lecons/F2T/13_S07_L3_P3_Desert_Soils_Vegetation.pptx
+++ b/lecons/F2T/13_S07_L3_P3_Desert_Soils_Vegetation.pptx
@@ -55,9 +55,12 @@
     <p:sldId id="303" r:id="rId49"/>
     <p:sldId id="304" r:id="rId50"/>
     <p:sldId id="305" r:id="rId51"/>
+    <p:sldId id="306" r:id="rId52"/>
+    <p:sldId id="307" r:id="rId53"/>
+    <p:sldId id="308" r:id="rId54"/>
   </p:sldIdLst>
   <p:notesMasterIdLst>
-    <p:notesMasterId r:id="rId52"/>
+    <p:notesMasterId r:id="rId55"/>
   </p:notesMasterIdLst>
   <p:sldSz cx="12192000" cy="6858000"/>
   <p:notesSz cx="6858000" cy="12192000"/>
@@ -727,7 +730,7 @@
           <a:p>
             <a:r>
               <a:rPr lang="en-US" dirty="0"/>
-              <a:t>Good. Fanta does not know why the cactus did not die.</a:t>
+              <a:t>Good. Fanta does not know how desert plants survive without water.</a:t>
             </a:r>
             <a:endParaRPr lang="en-US" dirty="0"/>
           </a:p>
@@ -815,7 +818,7 @@
           <a:p>
             <a:r>
               <a:rPr lang="en-US" dirty="0"/>
-              <a:t>Question 2: Which plant survived? Think for a moment, then raise your hand to answer.</a:t>
+              <a:t>Question 2: Which plant died? Think for a moment, then raise your hand to answer.</a:t>
             </a:r>
             <a:endParaRPr lang="en-US" dirty="0"/>
           </a:p>
@@ -903,7 +906,7 @@
           <a:p>
             <a:r>
               <a:rPr lang="en-US" dirty="0"/>
-              <a:t>Good. The cactus.</a:t>
+              <a:t>Good. The mango tree.</a:t>
             </a:r>
             <a:endParaRPr lang="en-US" dirty="0"/>
           </a:p>
@@ -991,7 +994,7 @@
           <a:p>
             <a:r>
               <a:rPr lang="en-US" dirty="0"/>
-              <a:t>Question 3: How did it survive? Think for a moment, then raise your hand to answer.</a:t>
+              <a:t>Question 3: Which plant survived? Think for a moment, then raise your hand to answer.</a:t>
             </a:r>
             <a:endParaRPr lang="en-US" dirty="0"/>
           </a:p>
@@ -1079,7 +1082,7 @@
           <a:p>
             <a:r>
               <a:rPr lang="en-US" dirty="0"/>
-              <a:t>Good. It keeps water inside its thick stem.</a:t>
+              <a:t>Good. The cactus.</a:t>
             </a:r>
             <a:endParaRPr lang="en-US" dirty="0"/>
           </a:p>
@@ -1343,7 +1346,7 @@
           <a:p>
             <a:r>
               <a:rPr lang="en-US" dirty="0"/>
-              <a:t>Activity 1. Look carefully at this picture: plants in a desert. Observe every detail before I ask the question.</a:t>
+              <a:t>Activity 1. Look carefully at this picture: desert plants. Observe every detail before I ask the question.</a:t>
             </a:r>
             <a:endParaRPr lang="en-US" dirty="0"/>
           </a:p>
@@ -1431,7 +1434,7 @@
           <a:p>
             <a:r>
               <a:rPr lang="en-US" dirty="0"/>
-              <a:t>Here is the question for Activity 1: Describe the plants. Why are they far apart? Take one minute to think and write your answer in your rough notebook.</a:t>
+              <a:t>Here is the question for Activity 1: Why are desert plants far apart? Take one minute to think and write your answer in your rough notebook.</a:t>
             </a:r>
             <a:endParaRPr lang="en-US" dirty="0"/>
           </a:p>
@@ -1607,7 +1610,7 @@
           <a:p>
             <a:r>
               <a:rPr lang="en-US" dirty="0"/>
-              <a:t>Let us check the answer together. They are small and far apart, because there is very little water.</a:t>
+              <a:t>Let us check the answer together. There is very little water.</a:t>
             </a:r>
             <a:endParaRPr lang="en-US" dirty="0"/>
           </a:p>
@@ -1783,7 +1786,7 @@
           <a:p>
             <a:r>
               <a:rPr lang="en-US" dirty="0"/>
-              <a:t>Here is the question for Activity 2: The cactus has a thick stem and spines. How do they help it? Take one minute to think and write your answer in your rough notebook.</a:t>
+              <a:t>Here is the question for Activity 2: How does the thick stem help the cactus? Take one minute to think and write your answer in your rough notebook.</a:t>
             </a:r>
             <a:endParaRPr lang="en-US" dirty="0"/>
           </a:p>
@@ -1871,7 +1874,7 @@
           <a:p>
             <a:r>
               <a:rPr lang="en-US" dirty="0"/>
-              <a:t>Let us check the answer together. The stem keeps water. The spines lose little water and protect it.</a:t>
+              <a:t>Let us check the answer together. It stores water.</a:t>
             </a:r>
             <a:endParaRPr lang="en-US" dirty="0"/>
           </a:p>
@@ -1959,7 +1962,7 @@
           <a:p>
             <a:r>
               <a:rPr lang="en-US" dirty="0"/>
-              <a:t>Activity 3. Look carefully at this diagram: an acacia in the desert. Observe every detail before I ask the question.</a:t>
+              <a:t>Activity 3. Look carefully at this diagram: the roots of desert plants. Observe every detail before I ask the question.</a:t>
             </a:r>
             <a:endParaRPr lang="en-US" dirty="0"/>
           </a:p>
@@ -2047,7 +2050,7 @@
           <a:p>
             <a:r>
               <a:rPr lang="en-US" dirty="0"/>
-              <a:t>Here is the question for Activity 3: Why are the roots so long? Take one minute to think and write your answer in your rough notebook.</a:t>
+              <a:t>Here is the question for Activity 3: Why are the roots of desert plants so long? Take one minute to think and write your answer in your rough notebook.</a:t>
             </a:r>
             <a:endParaRPr lang="en-US" dirty="0"/>
           </a:p>
@@ -2135,7 +2138,7 @@
           <a:p>
             <a:r>
               <a:rPr lang="en-US" dirty="0"/>
-              <a:t>Let us check the answer together. To reach water deep under the ground.</a:t>
+              <a:t>Let us check the answer together. To reach water deep underground.</a:t>
             </a:r>
             <a:endParaRPr lang="en-US" dirty="0"/>
           </a:p>
@@ -2223,7 +2226,7 @@
           <a:p>
             <a:r>
               <a:rPr lang="en-US" dirty="0"/>
-              <a:t>Activity 4. Look carefully at this picture: white salt on the soil of a desert. Observe every detail before I ask the question.</a:t>
+              <a:t>Activity 4. Look carefully at this picture: white salt on the ground. Observe every detail before I ask the question.</a:t>
             </a:r>
             <a:endParaRPr lang="en-US" dirty="0"/>
           </a:p>
@@ -2311,7 +2314,7 @@
           <a:p>
             <a:r>
               <a:rPr lang="en-US" dirty="0"/>
-              <a:t>Here is the question for Activity 4: The sun dries the soil and leaves white salt. Is this soil good for crops? Take one minute to think and write your answer in your rough notebook.</a:t>
+              <a:t>Here is the question for Activity 4: Is salty soil good for crops? Take one minute to think and write your answer in your rough notebook.</a:t>
             </a:r>
             <a:endParaRPr lang="en-US" dirty="0"/>
           </a:p>
@@ -2399,7 +2402,7 @@
           <a:p>
             <a:r>
               <a:rPr lang="en-US" dirty="0"/>
-              <a:t>Let us check the answer together. No. Salty soil is bad for crops.</a:t>
+              <a:t>Let us check the answer together. No.</a:t>
             </a:r>
             <a:endParaRPr lang="en-US" dirty="0"/>
           </a:p>
@@ -2575,7 +2578,7 @@
           <a:p>
             <a:r>
               <a:rPr lang="en-US" dirty="0"/>
-              <a:t>Activity 5. Look carefully at this picture: green fields near the River Nile, in Egypt. Observe every detail before I ask the question.</a:t>
+              <a:t>Activity 5. Look carefully at this picture: fields along the Nile. Observe every detail before I ask the question.</a:t>
             </a:r>
             <a:endParaRPr lang="en-US" dirty="0"/>
           </a:p>
@@ -2663,7 +2666,7 @@
           <a:p>
             <a:r>
               <a:rPr lang="en-US" dirty="0"/>
-              <a:t>Here is the question for Activity 5: Why are the fields green here, in the middle of the desert? Take one minute to think and write your answer in your rough notebook.</a:t>
+              <a:t>Here is the question for Activity 5: Why are the fields green here, in the desert? Take one minute to think and write your answer in your rough notebook.</a:t>
             </a:r>
             <a:endParaRPr lang="en-US" dirty="0"/>
           </a:p>
@@ -2751,7 +2754,7 @@
           <a:p>
             <a:r>
               <a:rPr lang="en-US" dirty="0"/>
-              <a:t>Let us check the answer together. Water from the Nile makes the desert soil fertile.</a:t>
+              <a:t>Let us check the answer together. Water from the Nile makes the soil fertile.</a:t>
             </a:r>
             <a:endParaRPr lang="en-US" dirty="0"/>
           </a:p>
@@ -2927,7 +2930,7 @@
           <a:p>
             <a:r>
               <a:rPr lang="en-US" dirty="0"/>
-              <a:t>Let us copy the definitions. The key terms of this lesson are defined as follows. On this slide we have Xerophyte and Humus. Write each point on a new line, with the key term first, and explain it in your own words when we revise.</a:t>
+              <a:t>Let us copy the definitions. The key terms of this lesson are defined as follows. On this slide we have Xerophyte. Write each point on a new line, with the key term first, and explain it in your own words when we revise.</a:t>
             </a:r>
             <a:endParaRPr lang="en-US" dirty="0"/>
           </a:p>
@@ -3015,7 +3018,7 @@
           <a:p>
             <a:r>
               <a:rPr lang="en-US" dirty="0"/>
-              <a:t>Let us copy Vegetation. Desert plants are few, and they are adapted in the following ways. On this slide we have Water storage and Small leaves or spines. Write each point on a new line, with the key term first, and explain it in your own words when we revise. When you finish, we go to the next slide.</a:t>
+              <a:t>Let us copy Vegetation. Desert plants have the following characteristics. Copy the point on Few and scattered on the left, then draw the diagram on the right: desert plants. Give it a title and label it clearly.</a:t>
             </a:r>
             <a:endParaRPr lang="en-US" dirty="0"/>
           </a:p>
@@ -3103,7 +3106,7 @@
           <a:p>
             <a:r>
               <a:rPr lang="en-US" dirty="0"/>
-              <a:t>We continue with Vegetation. On this slide we have Long roots and Short life. Write each point on a new line, with the key term first, and explain it in your own words when we revise.</a:t>
+              <a:t>Copy the point on Water storage on the left, then draw the diagram on the right: a cactus. Give it a title and label it clearly.</a:t>
             </a:r>
             <a:endParaRPr lang="en-US" dirty="0"/>
           </a:p>
@@ -3191,7 +3194,7 @@
           <a:p>
             <a:r>
               <a:rPr lang="en-US" dirty="0"/>
-              <a:t>Let us copy Soils. Desert soils have the following characteristics. On this slide we have Sandy or stony soils and Little humus. Write each point on a new line, with the key term first, and explain it in your own words when we revise. When you finish, we go to the next slide.</a:t>
+              <a:t>Copy the point on Long roots on the left, then draw the diagram on the right: long roots. Give it a title and label it clearly.</a:t>
             </a:r>
             <a:endParaRPr lang="en-US" dirty="0"/>
           </a:p>
@@ -3279,7 +3282,7 @@
           <a:p>
             <a:r>
               <a:rPr lang="en-US" dirty="0"/>
-              <a:t>We continue with Soils. On this slide we have Salty soils and Fertile with water. Write each point on a new line, with the key term first, and explain it in your own words when we revise.</a:t>
+              <a:t>We continue with Vegetation. On this slide we have Small leaves or spines and Short life cycle. Write each point on a new line, with the key term first, and explain it in your own words when we revise.</a:t>
             </a:r>
             <a:endParaRPr lang="en-US" dirty="0"/>
           </a:p>
@@ -3367,7 +3370,7 @@
           <a:p>
             <a:r>
               <a:rPr lang="en-US" dirty="0"/>
-              <a:t>Now let us check what you have understood. Question 1: Give two ways desert plants are adapted. Answer in your exercise book.</a:t>
+              <a:t>Let us copy Soils. Desert soils have the following characteristics. On this slide we have Sandy or stony and Little humus. Write each point on a new line, with the key term first, and explain it in your own words when we revise.</a:t>
             </a:r>
             <a:endParaRPr lang="en-US" dirty="0"/>
           </a:p>
@@ -3543,7 +3546,7 @@
           <a:p>
             <a:r>
               <a:rPr lang="en-US" dirty="0"/>
-              <a:t>The expected answer is: they keep water in their stems; they have long roots. If you got it right, well done.</a:t>
+              <a:t>Copy the point on Salty crusts on the left, then draw the diagram on the right: a salt crust. Give it a title and label it clearly.</a:t>
             </a:r>
             <a:endParaRPr lang="en-US" dirty="0"/>
           </a:p>
@@ -3631,7 +3634,7 @@
           <a:p>
             <a:r>
               <a:rPr lang="en-US" dirty="0"/>
-              <a:t>Now let us check what you have understood. Question 2: Why do desert soils have little humus? Answer in your exercise book.</a:t>
+              <a:t>We continue with Soils. On this slide we have Fertile with water. Write each point on a new line, with the key term first, and explain it in your own words when we revise.</a:t>
             </a:r>
             <a:endParaRPr lang="en-US" dirty="0"/>
           </a:p>
@@ -3719,7 +3722,7 @@
           <a:p>
             <a:r>
               <a:rPr lang="en-US" dirty="0"/>
-              <a:t>The expected answer is: because there are few plants. If you got it right, well done.</a:t>
+              <a:t>Now let us check what you have understood. Question 1: Give two ways desert plants are adapted. Answer in your exercise book.</a:t>
             </a:r>
             <a:endParaRPr lang="en-US" dirty="0"/>
           </a:p>
@@ -3807,7 +3810,7 @@
           <a:p>
             <a:r>
               <a:rPr lang="en-US" dirty="0"/>
-              <a:t>For those who need more practice, fill in the blanks in your exercise book. The answers are: number 1, xerophyte; number 2, stem; number 3, salty.</a:t>
+              <a:t>The expected answer is: they keep water in their stems; they have long roots. If you got it right, well done.</a:t>
             </a:r>
             <a:endParaRPr lang="en-US" dirty="0"/>
           </a:p>
@@ -3895,7 +3898,7 @@
           <a:p>
             <a:r>
               <a:rPr lang="en-US" dirty="0"/>
-              <a:t>For your homework: Imagine you must spend one week in the Sahara. Write down three problems you would face and one way to solve each. We shall correct it at the beginning of our next lesson.</a:t>
+              <a:t>Now let us check what you have understood. Question 2: Why do desert soils have little humus? Answer in your exercise book.</a:t>
             </a:r>
             <a:endParaRPr lang="en-US" dirty="0"/>
           </a:p>
@@ -3983,7 +3986,7 @@
           <a:p>
             <a:r>
               <a:rPr lang="en-US" dirty="0"/>
-              <a:t>Our next lesson will be on Lesson 3 (Part 4): The Desert Regions: Problems Faced and Adaptations. Thank you for your attention, and see you next time.</a:t>
+              <a:t>The expected answer is: because there are few plants. If you got it right, well done.</a:t>
             </a:r>
             <a:endParaRPr lang="en-US" dirty="0"/>
           </a:p>
@@ -4071,7 +4074,7 @@
           <a:p>
             <a:r>
               <a:rPr lang="en-US" dirty="0"/>
-              <a:t>Let us play the bilingual game. I say a word in English, and you give me the French word. Then we do the reverse.</a:t>
+              <a:t>For those who need more practice, fill in the blanks in your exercise book. The answers are: number 1, xerophyte; number 2, stem; number 3, salty.</a:t>
             </a:r>
             <a:endParaRPr lang="en-US" dirty="0"/>
           </a:p>
@@ -4159,7 +4162,7 @@
           <a:p>
             <a:r>
               <a:rPr lang="en-US" dirty="0"/>
-              <a:t>I record this information in the official logbook of the class after the lesson.</a:t>
+              <a:t>For your homework: Imagine you must spend one week in the Sahara. Write down three problems you would face and one way to solve each. We shall correct it at the beginning of our next lesson.</a:t>
             </a:r>
             <a:endParaRPr lang="en-US" dirty="0"/>
           </a:p>
@@ -4247,7 +4250,7 @@
           <a:p>
             <a:r>
               <a:rPr lang="en-US" dirty="0"/>
-              <a:t>I complete the second page of the logbook: the matter taught, the evaluation, the homework and the attendance.</a:t>
+              <a:t>Our next lesson will be on Lesson 3 (Part 4): The Desert Regions: Problems Faced and Adaptations. Thank you for your attention, and see you next time.</a:t>
             </a:r>
             <a:endParaRPr lang="en-US" dirty="0"/>
           </a:p>
@@ -4335,7 +4338,7 @@
           <a:p>
             <a:r>
               <a:rPr lang="en-US" dirty="0"/>
-              <a:t>This slide is for me, the teacher: it gives the timing of the lesson and what to do if the projector is not available.</a:t>
+              <a:t>Let us play the bilingual game. I say a word in English, and you give me the French word. Then we do the reverse.</a:t>
             </a:r>
             <a:endParaRPr lang="en-US" dirty="0"/>
           </a:p>
@@ -4511,7 +4514,7 @@
           <a:p>
             <a:r>
               <a:rPr lang="en-US" dirty="0"/>
-              <a:t>These are the references and picture credits used to prepare this lesson.</a:t>
+              <a:t>I record this information in the official logbook of the class after the lesson.</a:t>
             </a:r>
             <a:endParaRPr lang="en-US" dirty="0"/>
           </a:p>
@@ -4535,6 +4538,270 @@
             <a:fld id="{F7021451-1387-4CA6-816F-3879F97B5CBC}" type="slidenum">
               <a:rPr lang="en-US"/>
               <a:t>50</a:t>
+            </a:fld>
+            <a:endParaRPr lang="en-US"/>
+          </a:p>
+        </p:txBody>
+      </p:sp>
+    </p:spTree>
+    <p:extLst>
+      <p:ext uri="{BB962C8B-B14F-4D97-AF65-F5344CB8AC3E}">
+        <p14:creationId xmlns:p14="http://schemas.microsoft.com/office/powerpoint/2010/main" val="1024086991"/>
+      </p:ext>
+    </p:extLst>
+  </p:cSld>
+  <p:clrMapOvr>
+    <a:masterClrMapping/>
+  </p:clrMapOvr>
+</p:notes>
+</file>
+
+<file path=ppt/notesSlides/notesSlide51.xml><?xml version="1.0" encoding="utf-8"?>
+<p:notes xmlns:a="http://schemas.openxmlformats.org/drawingml/2006/main" xmlns:r="http://schemas.openxmlformats.org/officeDocument/2006/relationships" xmlns:p="http://schemas.openxmlformats.org/presentationml/2006/main">
+  <p:cSld>
+    <p:spTree>
+      <p:nvGrpSpPr>
+        <p:cNvPr id="1" name=""/>
+        <p:cNvGrpSpPr/>
+        <p:nvPr/>
+      </p:nvGrpSpPr>
+      <p:grpSpPr>
+        <a:xfrm>
+          <a:off x="0" y="0"/>
+          <a:ext cx="0" cy="0"/>
+          <a:chOff x="0" y="0"/>
+          <a:chExt cx="0" cy="0"/>
+        </a:xfrm>
+      </p:grpSpPr>
+      <p:sp>
+        <p:nvSpPr>
+          <p:cNvPr id="2" name="Slide Image Placeholder 1"/>
+          <p:cNvSpPr>
+            <a:spLocks noGrp="1" noRot="1" noChangeAspect="1"/>
+          </p:cNvSpPr>
+          <p:nvPr>
+            <p:ph type="sldImg"/>
+          </p:nvPr>
+        </p:nvSpPr>
+        <p:spPr/>
+      </p:sp>
+      <p:sp>
+        <p:nvSpPr>
+          <p:cNvPr id="3" name="Notes Placeholder 2"/>
+          <p:cNvSpPr>
+            <a:spLocks noGrp="1"/>
+          </p:cNvSpPr>
+          <p:nvPr>
+            <p:ph type="body" idx="1"/>
+          </p:nvPr>
+        </p:nvSpPr>
+        <p:spPr/>
+        <p:txBody>
+          <a:bodyPr/>
+          <a:lstStyle/>
+          <a:p>
+            <a:r>
+              <a:rPr lang="en-US" dirty="0"/>
+              <a:t>I complete the second page of the logbook: the matter taught, the evaluation, the homework and the attendance.</a:t>
+            </a:r>
+            <a:endParaRPr lang="en-US" dirty="0"/>
+          </a:p>
+        </p:txBody>
+      </p:sp>
+      <p:sp>
+        <p:nvSpPr>
+          <p:cNvPr id="4" name="Slide Number Placeholder 3"/>
+          <p:cNvSpPr>
+            <a:spLocks noGrp="1"/>
+          </p:cNvSpPr>
+          <p:nvPr>
+            <p:ph type="sldNum" sz="quarter" idx="10"/>
+          </p:nvPr>
+        </p:nvSpPr>
+        <p:spPr/>
+        <p:txBody>
+          <a:bodyPr/>
+          <a:lstStyle/>
+          <a:p>
+            <a:fld id="{F7021451-1387-4CA6-816F-3879F97B5CBC}" type="slidenum">
+              <a:rPr lang="en-US"/>
+              <a:t>51</a:t>
+            </a:fld>
+            <a:endParaRPr lang="en-US"/>
+          </a:p>
+        </p:txBody>
+      </p:sp>
+    </p:spTree>
+    <p:extLst>
+      <p:ext uri="{BB962C8B-B14F-4D97-AF65-F5344CB8AC3E}">
+        <p14:creationId xmlns:p14="http://schemas.microsoft.com/office/powerpoint/2010/main" val="1024086991"/>
+      </p:ext>
+    </p:extLst>
+  </p:cSld>
+  <p:clrMapOvr>
+    <a:masterClrMapping/>
+  </p:clrMapOvr>
+</p:notes>
+</file>
+
+<file path=ppt/notesSlides/notesSlide52.xml><?xml version="1.0" encoding="utf-8"?>
+<p:notes xmlns:a="http://schemas.openxmlformats.org/drawingml/2006/main" xmlns:r="http://schemas.openxmlformats.org/officeDocument/2006/relationships" xmlns:p="http://schemas.openxmlformats.org/presentationml/2006/main">
+  <p:cSld>
+    <p:spTree>
+      <p:nvGrpSpPr>
+        <p:cNvPr id="1" name=""/>
+        <p:cNvGrpSpPr/>
+        <p:nvPr/>
+      </p:nvGrpSpPr>
+      <p:grpSpPr>
+        <a:xfrm>
+          <a:off x="0" y="0"/>
+          <a:ext cx="0" cy="0"/>
+          <a:chOff x="0" y="0"/>
+          <a:chExt cx="0" cy="0"/>
+        </a:xfrm>
+      </p:grpSpPr>
+      <p:sp>
+        <p:nvSpPr>
+          <p:cNvPr id="2" name="Slide Image Placeholder 1"/>
+          <p:cNvSpPr>
+            <a:spLocks noGrp="1" noRot="1" noChangeAspect="1"/>
+          </p:cNvSpPr>
+          <p:nvPr>
+            <p:ph type="sldImg"/>
+          </p:nvPr>
+        </p:nvSpPr>
+        <p:spPr/>
+      </p:sp>
+      <p:sp>
+        <p:nvSpPr>
+          <p:cNvPr id="3" name="Notes Placeholder 2"/>
+          <p:cNvSpPr>
+            <a:spLocks noGrp="1"/>
+          </p:cNvSpPr>
+          <p:nvPr>
+            <p:ph type="body" idx="1"/>
+          </p:nvPr>
+        </p:nvSpPr>
+        <p:spPr/>
+        <p:txBody>
+          <a:bodyPr/>
+          <a:lstStyle/>
+          <a:p>
+            <a:r>
+              <a:rPr lang="en-US" dirty="0"/>
+              <a:t>This slide is for me, the teacher: it gives the timing of the lesson and what to do if the projector is not available.</a:t>
+            </a:r>
+            <a:endParaRPr lang="en-US" dirty="0"/>
+          </a:p>
+        </p:txBody>
+      </p:sp>
+      <p:sp>
+        <p:nvSpPr>
+          <p:cNvPr id="4" name="Slide Number Placeholder 3"/>
+          <p:cNvSpPr>
+            <a:spLocks noGrp="1"/>
+          </p:cNvSpPr>
+          <p:nvPr>
+            <p:ph type="sldNum" sz="quarter" idx="10"/>
+          </p:nvPr>
+        </p:nvSpPr>
+        <p:spPr/>
+        <p:txBody>
+          <a:bodyPr/>
+          <a:lstStyle/>
+          <a:p>
+            <a:fld id="{F7021451-1387-4CA6-816F-3879F97B5CBC}" type="slidenum">
+              <a:rPr lang="en-US"/>
+              <a:t>52</a:t>
+            </a:fld>
+            <a:endParaRPr lang="en-US"/>
+          </a:p>
+        </p:txBody>
+      </p:sp>
+    </p:spTree>
+    <p:extLst>
+      <p:ext uri="{BB962C8B-B14F-4D97-AF65-F5344CB8AC3E}">
+        <p14:creationId xmlns:p14="http://schemas.microsoft.com/office/powerpoint/2010/main" val="1024086991"/>
+      </p:ext>
+    </p:extLst>
+  </p:cSld>
+  <p:clrMapOvr>
+    <a:masterClrMapping/>
+  </p:clrMapOvr>
+</p:notes>
+</file>
+
+<file path=ppt/notesSlides/notesSlide53.xml><?xml version="1.0" encoding="utf-8"?>
+<p:notes xmlns:a="http://schemas.openxmlformats.org/drawingml/2006/main" xmlns:r="http://schemas.openxmlformats.org/officeDocument/2006/relationships" xmlns:p="http://schemas.openxmlformats.org/presentationml/2006/main">
+  <p:cSld>
+    <p:spTree>
+      <p:nvGrpSpPr>
+        <p:cNvPr id="1" name=""/>
+        <p:cNvGrpSpPr/>
+        <p:nvPr/>
+      </p:nvGrpSpPr>
+      <p:grpSpPr>
+        <a:xfrm>
+          <a:off x="0" y="0"/>
+          <a:ext cx="0" cy="0"/>
+          <a:chOff x="0" y="0"/>
+          <a:chExt cx="0" cy="0"/>
+        </a:xfrm>
+      </p:grpSpPr>
+      <p:sp>
+        <p:nvSpPr>
+          <p:cNvPr id="2" name="Slide Image Placeholder 1"/>
+          <p:cNvSpPr>
+            <a:spLocks noGrp="1" noRot="1" noChangeAspect="1"/>
+          </p:cNvSpPr>
+          <p:nvPr>
+            <p:ph type="sldImg"/>
+          </p:nvPr>
+        </p:nvSpPr>
+        <p:spPr/>
+      </p:sp>
+      <p:sp>
+        <p:nvSpPr>
+          <p:cNvPr id="3" name="Notes Placeholder 2"/>
+          <p:cNvSpPr>
+            <a:spLocks noGrp="1"/>
+          </p:cNvSpPr>
+          <p:nvPr>
+            <p:ph type="body" idx="1"/>
+          </p:nvPr>
+        </p:nvSpPr>
+        <p:spPr/>
+        <p:txBody>
+          <a:bodyPr/>
+          <a:lstStyle/>
+          <a:p>
+            <a:r>
+              <a:rPr lang="en-US" dirty="0"/>
+              <a:t>These are the references and picture credits used to prepare this lesson.</a:t>
+            </a:r>
+            <a:endParaRPr lang="en-US" dirty="0"/>
+          </a:p>
+        </p:txBody>
+      </p:sp>
+      <p:sp>
+        <p:nvSpPr>
+          <p:cNvPr id="4" name="Slide Number Placeholder 3"/>
+          <p:cNvSpPr>
+            <a:spLocks noGrp="1"/>
+          </p:cNvSpPr>
+          <p:nvPr>
+            <p:ph type="sldNum" sz="quarter" idx="10"/>
+          </p:nvPr>
+        </p:nvSpPr>
+        <p:spPr/>
+        <p:txBody>
+          <a:bodyPr/>
+          <a:lstStyle/>
+          <a:p>
+            <a:fld id="{F7021451-1387-4CA6-816F-3879F97B5CBC}" type="slidenum">
+              <a:rPr lang="en-US"/>
+              <a:t>53</a:t>
             </a:fld>
             <a:endParaRPr lang="en-US"/>
           </a:p>
@@ -4863,7 +5130,7 @@
           <a:p>
             <a:r>
               <a:rPr lang="en-US" dirty="0"/>
-              <a:t>Listen carefully to this situation from real life. Fanta planted a mango tree and a small cactus in front of her house in Garoua. She forgot to water them for three months. In March, the mango tree was dead, but the cactus was still green. Think about it, because I am going to ask you some questions.</a:t>
+              <a:t>Listen carefully to this situation from real life. Fanta planted a mango tree and a small cactus in front of her house in Garoua. She forgot to water them for three months. In March, the mango tree was dead, but the cactus was still green. Fanta asks: "How can desert plants live with so little water?" Think about it, because I am going to ask you some questions.</a:t>
             </a:r>
             <a:endParaRPr lang="en-US" dirty="0"/>
           </a:p>
@@ -6546,7 +6813,7 @@
                 <a:ea typeface="Times New Roman" pitchFamily="34" charset="-122"/>
                 <a:cs typeface="Times New Roman" pitchFamily="34" charset="-120"/>
               </a:rPr>
-              <a:t>Fanta does not know why the cactus did not die.</a:t>
+              <a:t>Fanta does not know how desert plants survive without water.</a:t>
             </a:r>
             <a:endParaRPr lang="en-US" sz="4000" dirty="0"/>
           </a:p>
@@ -6765,7 +7032,7 @@
                 <a:ea typeface="Times New Roman" pitchFamily="34" charset="-122"/>
                 <a:cs typeface="Times New Roman" pitchFamily="34" charset="-120"/>
               </a:rPr>
-              <a:t>Which plant survived?</a:t>
+              <a:t>Which plant died?</a:t>
             </a:r>
             <a:endParaRPr lang="en-US" sz="4000" dirty="0"/>
           </a:p>
@@ -6984,7 +7251,7 @@
                 <a:ea typeface="Times New Roman" pitchFamily="34" charset="-122"/>
                 <a:cs typeface="Times New Roman" pitchFamily="34" charset="-120"/>
               </a:rPr>
-              <a:t>The cactus.</a:t>
+              <a:t>The mango tree.</a:t>
             </a:r>
             <a:endParaRPr lang="en-US" sz="4000" dirty="0"/>
           </a:p>
@@ -7203,7 +7470,7 @@
                 <a:ea typeface="Times New Roman" pitchFamily="34" charset="-122"/>
                 <a:cs typeface="Times New Roman" pitchFamily="34" charset="-120"/>
               </a:rPr>
-              <a:t>How did it survive?</a:t>
+              <a:t>Which plant survived?</a:t>
             </a:r>
             <a:endParaRPr lang="en-US" sz="4000" dirty="0"/>
           </a:p>
@@ -7422,7 +7689,7 @@
                 <a:ea typeface="Times New Roman" pitchFamily="34" charset="-122"/>
                 <a:cs typeface="Times New Roman" pitchFamily="34" charset="-120"/>
               </a:rPr>
-              <a:t>It keeps water inside its thick stem.</a:t>
+              <a:t>The cactus.</a:t>
             </a:r>
             <a:endParaRPr lang="en-US" sz="4000" dirty="0"/>
           </a:p>
@@ -8074,7 +8341,7 @@
                 <a:ea typeface="Times New Roman" pitchFamily="34" charset="-122"/>
                 <a:cs typeface="Times New Roman" pitchFamily="34" charset="-120"/>
               </a:rPr>
-              <a:t>Plants in a desert.</a:t>
+              <a:t>Desert plants.</a:t>
             </a:r>
             <a:endParaRPr lang="en-US" sz="1800" dirty="0"/>
           </a:p>
@@ -8293,7 +8560,7 @@
                 <a:ea typeface="Times New Roman" pitchFamily="34" charset="-122"/>
                 <a:cs typeface="Times New Roman" pitchFamily="34" charset="-120"/>
               </a:rPr>
-              <a:t>Describe the plants. Why are they far apart?</a:t>
+              <a:t>Why are desert plants far apart?</a:t>
             </a:r>
             <a:endParaRPr lang="en-US" sz="4000" dirty="0"/>
           </a:p>
@@ -9107,7 +9374,7 @@
                 <a:ea typeface="Times New Roman" pitchFamily="34" charset="-122"/>
                 <a:cs typeface="Times New Roman" pitchFamily="34" charset="-120"/>
               </a:rPr>
-              <a:t>They are small and far apart, because there is very little water.</a:t>
+              <a:t>There is very little water.</a:t>
             </a:r>
             <a:endParaRPr lang="en-US" sz="4000" dirty="0"/>
           </a:p>
@@ -9540,7 +9807,7 @@
                 <a:ea typeface="Times New Roman" pitchFamily="34" charset="-122"/>
                 <a:cs typeface="Times New Roman" pitchFamily="34" charset="-120"/>
               </a:rPr>
-              <a:t>The cactus has a thick stem and spines. How do they help it?</a:t>
+              <a:t>How does the thick stem help the cactus?</a:t>
             </a:r>
             <a:endParaRPr lang="en-US" sz="4000" dirty="0"/>
           </a:p>
@@ -9759,7 +10026,7 @@
                 <a:ea typeface="Times New Roman" pitchFamily="34" charset="-122"/>
                 <a:cs typeface="Times New Roman" pitchFamily="34" charset="-120"/>
               </a:rPr>
-              <a:t>The stem keeps water. The spines lose little water and protect it.</a:t>
+              <a:t>It stores water.</a:t>
             </a:r>
             <a:endParaRPr lang="en-US" sz="4000" dirty="0"/>
           </a:p>
@@ -9973,7 +10240,7 @@
                 <a:ea typeface="Times New Roman" pitchFamily="34" charset="-122"/>
                 <a:cs typeface="Times New Roman" pitchFamily="34" charset="-120"/>
               </a:rPr>
-              <a:t>An acacia in the desert.</a:t>
+              <a:t>The roots of desert plants.</a:t>
             </a:r>
             <a:endParaRPr lang="en-US" sz="1800" dirty="0"/>
           </a:p>
@@ -10192,7 +10459,7 @@
                 <a:ea typeface="Times New Roman" pitchFamily="34" charset="-122"/>
                 <a:cs typeface="Times New Roman" pitchFamily="34" charset="-120"/>
               </a:rPr>
-              <a:t>Why are the roots so long?</a:t>
+              <a:t>Why are the roots of desert plants so long?</a:t>
             </a:r>
             <a:endParaRPr lang="en-US" sz="4000" dirty="0"/>
           </a:p>
@@ -10411,7 +10678,7 @@
                 <a:ea typeface="Times New Roman" pitchFamily="34" charset="-122"/>
                 <a:cs typeface="Times New Roman" pitchFamily="34" charset="-120"/>
               </a:rPr>
-              <a:t>To reach water deep under the ground.</a:t>
+              <a:t>To reach water deep underground.</a:t>
             </a:r>
             <a:endParaRPr lang="en-US" sz="4000" dirty="0"/>
           </a:p>
@@ -10625,7 +10892,7 @@
                 <a:ea typeface="Times New Roman" pitchFamily="34" charset="-122"/>
                 <a:cs typeface="Times New Roman" pitchFamily="34" charset="-120"/>
               </a:rPr>
-              <a:t>White salt on the soil of a desert.</a:t>
+              <a:t>White salt on the ground.</a:t>
             </a:r>
             <a:endParaRPr lang="en-US" sz="1800" dirty="0"/>
           </a:p>
@@ -10844,7 +11111,7 @@
                 <a:ea typeface="Times New Roman" pitchFamily="34" charset="-122"/>
                 <a:cs typeface="Times New Roman" pitchFamily="34" charset="-120"/>
               </a:rPr>
-              <a:t>The sun dries the soil and leaves white salt. Is this soil good for crops?</a:t>
+              <a:t>Is salty soil good for crops?</a:t>
             </a:r>
             <a:endParaRPr lang="en-US" sz="4000" dirty="0"/>
           </a:p>
@@ -11063,7 +11330,7 @@
                 <a:ea typeface="Times New Roman" pitchFamily="34" charset="-122"/>
                 <a:cs typeface="Times New Roman" pitchFamily="34" charset="-120"/>
               </a:rPr>
-              <a:t>No. Salty soil is bad for crops.</a:t>
+              <a:t>No.</a:t>
             </a:r>
             <a:endParaRPr lang="en-US" sz="4000" dirty="0"/>
           </a:p>
@@ -12286,7 +12553,7 @@
                 <a:ea typeface="Times New Roman" pitchFamily="34" charset="-122"/>
                 <a:cs typeface="Times New Roman" pitchFamily="34" charset="-120"/>
               </a:rPr>
-              <a:t>Green fields near the River Nile, in Egypt.</a:t>
+              <a:t>Fields along the Nile.</a:t>
             </a:r>
             <a:endParaRPr lang="en-US" sz="1800" dirty="0"/>
           </a:p>
@@ -12505,7 +12772,7 @@
                 <a:ea typeface="Times New Roman" pitchFamily="34" charset="-122"/>
                 <a:cs typeface="Times New Roman" pitchFamily="34" charset="-120"/>
               </a:rPr>
-              <a:t>Why are the fields green here, in the middle of the desert?</a:t>
+              <a:t>Why are the fields green here, in the desert?</a:t>
             </a:r>
             <a:endParaRPr lang="en-US" sz="4000" dirty="0"/>
           </a:p>
@@ -12724,7 +12991,7 @@
                 <a:ea typeface="Times New Roman" pitchFamily="34" charset="-122"/>
                 <a:cs typeface="Times New Roman" pitchFamily="34" charset="-120"/>
               </a:rPr>
-              <a:t>Water from the Nile makes the desert soil fertile.</a:t>
+              <a:t>Water from the Nile makes the soil fertile.</a:t>
             </a:r>
             <a:endParaRPr lang="en-US" sz="4000" dirty="0"/>
           </a:p>
@@ -12935,7 +13202,7 @@
               <a:buNone/>
             </a:pPr>
             <a:r>
-              <a:rPr lang="en-US" sz="4000" b="1" dirty="0">
+              <a:rPr lang="en-US" sz="3200" b="1" dirty="0">
                 <a:solidFill>
                   <a:srgbClr val="111111"/>
                 </a:solidFill>
@@ -12945,7 +13212,7 @@
               </a:rPr>
               <a:t>Topic: Man in His Environment</a:t>
             </a:r>
-            <a:endParaRPr lang="en-US" sz="4000" dirty="0"/>
+            <a:endParaRPr lang="en-US" sz="3200" dirty="0"/>
           </a:p>
           <a:p>
             <a:pPr algn="l" indent="0" marL="0">
@@ -12955,7 +13222,7 @@
               <a:buNone/>
             </a:pPr>
             <a:r>
-              <a:rPr lang="en-US" sz="4000" b="1" dirty="0">
+              <a:rPr lang="en-US" sz="3200" b="1" dirty="0">
                 <a:solidFill>
                   <a:srgbClr val="111111"/>
                 </a:solidFill>
@@ -12965,7 +13232,7 @@
               </a:rPr>
               <a:t>Sub-topic: Natural Regions</a:t>
             </a:r>
-            <a:endParaRPr lang="en-US" sz="4000" dirty="0"/>
+            <a:endParaRPr lang="en-US" sz="3200" dirty="0"/>
           </a:p>
           <a:p>
             <a:pPr algn="l" indent="0" marL="0">
@@ -12975,7 +13242,7 @@
               <a:buNone/>
             </a:pPr>
             <a:r>
-              <a:rPr lang="en-US" sz="4000" b="1" dirty="0">
+              <a:rPr lang="en-US" sz="3200" b="1" dirty="0">
                 <a:solidFill>
                   <a:srgbClr val="990011"/>
                 </a:solidFill>
@@ -12985,7 +13252,7 @@
               </a:rPr>
               <a:t>Lesson 3 (Part 3): The Desert Regions: Characteristics (Soils and Vegetation)</a:t>
             </a:r>
-            <a:endParaRPr lang="en-US" sz="4000" dirty="0"/>
+            <a:endParaRPr lang="en-US" sz="3200" dirty="0"/>
           </a:p>
         </p:txBody>
       </p:sp>
@@ -13118,7 +13385,7 @@
         <p:spPr>
           <a:xfrm>
             <a:off x="0" y="658368"/>
-            <a:ext cx="3840480" cy="5833872"/>
+            <a:ext cx="5120640" cy="5833872"/>
           </a:xfrm>
           <a:prstGeom prst="rect">
             <a:avLst/>
@@ -13133,8 +13400,8 @@
         </p:nvSpPr>
         <p:spPr>
           <a:xfrm>
-            <a:off x="4069080" y="1005840"/>
-            <a:ext cx="7802575" cy="731520"/>
+            <a:off x="5349240" y="1005840"/>
+            <a:ext cx="6522415" cy="731520"/>
           </a:xfrm>
           <a:prstGeom prst="rect">
             <a:avLst/>
@@ -13174,8 +13441,8 @@
         </p:nvSpPr>
         <p:spPr>
           <a:xfrm>
-            <a:off x="4069080" y="1783080"/>
-            <a:ext cx="7802575" cy="4663440"/>
+            <a:off x="5349240" y="1783080"/>
+            <a:ext cx="6522415" cy="4663440"/>
           </a:xfrm>
           <a:prstGeom prst="rect">
             <a:avLst/>
@@ -13207,11 +13474,12 @@
             <a:endParaRPr lang="en-US" sz="4000" dirty="0"/>
           </a:p>
           <a:p>
-            <a:pPr algn="l" indent="0" marL="0">
+            <a:pPr algn="l" marL="342900" indent="-342900">
               <a:spcAft>
                 <a:spcPts val="800"/>
               </a:spcAft>
-              <a:buNone/>
+              <a:buSzPct val="100000"/>
+              <a:buChar char="•"/>
             </a:pPr>
             <a:r>
               <a:rPr lang="en-US" sz="4000" b="1" dirty="0">
@@ -13224,11 +13492,12 @@
               </a:rPr>
               <a:t>Xerophyte: </a:t>
             </a:r>
-            <a:pPr algn="l" indent="0" marL="0">
+            <a:pPr algn="l" marL="342900" indent="-342900">
               <a:spcAft>
                 <a:spcPts val="800"/>
               </a:spcAft>
-              <a:buNone/>
+              <a:buSzPct val="100000"/>
+              <a:buChar char="•"/>
             </a:pPr>
             <a:r>
               <a:rPr lang="en-US" sz="4000" dirty="0">
@@ -13239,44 +13508,7 @@
                 <a:ea typeface="Times New Roman" pitchFamily="34" charset="-122"/>
                 <a:cs typeface="Times New Roman" pitchFamily="34" charset="-120"/>
               </a:rPr>
-              <a:t>It is a plant that can live with very little water.</a:t>
-            </a:r>
-            <a:endParaRPr lang="en-US" sz="4000" dirty="0"/>
-          </a:p>
-          <a:p>
-            <a:pPr algn="l" indent="0" marL="0">
-              <a:spcAft>
-                <a:spcPts val="800"/>
-              </a:spcAft>
-              <a:buNone/>
-            </a:pPr>
-            <a:r>
-              <a:rPr lang="en-US" sz="4000" b="1" dirty="0">
-                <a:solidFill>
-                  <a:srgbClr val="111111"/>
-                </a:solidFill>
-                <a:latin typeface="Times New Roman" pitchFamily="34" charset="0"/>
-                <a:ea typeface="Times New Roman" pitchFamily="34" charset="-122"/>
-                <a:cs typeface="Times New Roman" pitchFamily="34" charset="-120"/>
-              </a:rPr>
-              <a:t>Humus: </a:t>
-            </a:r>
-            <a:pPr algn="l" indent="0" marL="0">
-              <a:spcAft>
-                <a:spcPts val="800"/>
-              </a:spcAft>
-              <a:buNone/>
-            </a:pPr>
-            <a:r>
-              <a:rPr lang="en-US" sz="4000" dirty="0">
-                <a:solidFill>
-                  <a:srgbClr val="111111"/>
-                </a:solidFill>
-                <a:latin typeface="Times New Roman" pitchFamily="34" charset="0"/>
-                <a:ea typeface="Times New Roman" pitchFamily="34" charset="-122"/>
-                <a:cs typeface="Times New Roman" pitchFamily="34" charset="-120"/>
-              </a:rPr>
-              <a:t>It is the dark part of the soil made of dead plants.</a:t>
+              <a:t>It is a plant adapted to very dry conditions.</a:t>
             </a:r>
             <a:endParaRPr lang="en-US" sz="4000" dirty="0"/>
           </a:p>
@@ -13394,9 +13626,131 @@
           </a:p>
         </p:txBody>
       </p:sp>
+      <p:sp>
+        <p:nvSpPr>
+          <p:cNvPr id="3" name="Text 1"/>
+          <p:cNvSpPr/>
+          <p:nvPr/>
+        </p:nvSpPr>
+        <p:spPr>
+          <a:xfrm>
+            <a:off x="365760" y="1005840"/>
+            <a:ext cx="11460175" cy="731520"/>
+          </a:xfrm>
+          <a:prstGeom prst="rect">
+            <a:avLst/>
+          </a:prstGeom>
+          <a:noFill/>
+          <a:ln/>
+        </p:spPr>
+        <p:txBody>
+          <a:bodyPr wrap="square" lIns="0" tIns="0" rIns="0" bIns="0" rtlCol="0" anchor="ctr">
+            <a:normAutofit/>
+          </a:bodyPr>
+          <a:lstStyle/>
+          <a:p>
+            <a:pPr algn="ctr" indent="0" marL="0">
+              <a:buNone/>
+            </a:pPr>
+            <a:r>
+              <a:rPr lang="en-US" sz="3600" b="1" dirty="0">
+                <a:solidFill>
+                  <a:srgbClr val="990011"/>
+                </a:solidFill>
+                <a:latin typeface="Times New Roman" pitchFamily="34" charset="0"/>
+                <a:ea typeface="Times New Roman" pitchFamily="34" charset="-122"/>
+                <a:cs typeface="Times New Roman" pitchFamily="34" charset="-120"/>
+              </a:rPr>
+              <a:t>1. Vegetation</a:t>
+            </a:r>
+            <a:endParaRPr lang="en-US" sz="3600" dirty="0"/>
+          </a:p>
+        </p:txBody>
+      </p:sp>
+      <p:sp>
+        <p:nvSpPr>
+          <p:cNvPr id="4" name="Text 2"/>
+          <p:cNvSpPr/>
+          <p:nvPr/>
+        </p:nvSpPr>
+        <p:spPr>
+          <a:xfrm>
+            <a:off x="365760" y="1783080"/>
+            <a:ext cx="4846320" cy="4617720"/>
+          </a:xfrm>
+          <a:prstGeom prst="rect">
+            <a:avLst/>
+          </a:prstGeom>
+          <a:noFill/>
+          <a:ln/>
+        </p:spPr>
+        <p:txBody>
+          <a:bodyPr wrap="square" lIns="0" tIns="0" rIns="0" bIns="0" rtlCol="0" anchor="t"/>
+          <a:lstStyle/>
+          <a:p>
+            <a:pPr algn="l" indent="0" marL="0">
+              <a:spcAft>
+                <a:spcPts val="800"/>
+              </a:spcAft>
+              <a:buNone/>
+            </a:pPr>
+            <a:r>
+              <a:rPr lang="en-US" sz="3600" i="1" dirty="0">
+                <a:solidFill>
+                  <a:srgbClr val="111111"/>
+                </a:solidFill>
+                <a:latin typeface="Times New Roman" pitchFamily="34" charset="0"/>
+                <a:ea typeface="Times New Roman" pitchFamily="34" charset="-122"/>
+                <a:cs typeface="Times New Roman" pitchFamily="34" charset="-120"/>
+              </a:rPr>
+              <a:t>Desert plants have the following characteristics:</a:t>
+            </a:r>
+            <a:endParaRPr lang="en-US" sz="3600" dirty="0"/>
+          </a:p>
+          <a:p>
+            <a:pPr algn="l" marL="342900" indent="-342900">
+              <a:spcAft>
+                <a:spcPts val="800"/>
+              </a:spcAft>
+              <a:buSzPct val="100000"/>
+              <a:buChar char="•"/>
+            </a:pPr>
+            <a:r>
+              <a:rPr lang="en-US" sz="3600" b="1" dirty="0">
+                <a:solidFill>
+                  <a:srgbClr val="111111"/>
+                </a:solidFill>
+                <a:latin typeface="Times New Roman" pitchFamily="34" charset="0"/>
+                <a:ea typeface="Times New Roman" pitchFamily="34" charset="-122"/>
+                <a:cs typeface="Times New Roman" pitchFamily="34" charset="-120"/>
+              </a:rPr>
+              <a:t>Few and scattered: </a:t>
+            </a:r>
+            <a:pPr algn="l" marL="342900" indent="-342900">
+              <a:spcAft>
+                <a:spcPts val="800"/>
+              </a:spcAft>
+              <a:buSzPct val="100000"/>
+              <a:buChar char="•"/>
+            </a:pPr>
+            <a:r>
+              <a:rPr lang="en-US" sz="3600" dirty="0">
+                <a:solidFill>
+                  <a:srgbClr val="111111"/>
+                </a:solidFill>
+                <a:latin typeface="Times New Roman" pitchFamily="34" charset="0"/>
+                <a:ea typeface="Times New Roman" pitchFamily="34" charset="-122"/>
+                <a:cs typeface="Times New Roman" pitchFamily="34" charset="-120"/>
+              </a:rPr>
+              <a:t>Plants grow far apart.</a:t>
+            </a:r>
+            <a:endParaRPr lang="en-US" sz="3600" dirty="0"/>
+          </a:p>
+        </p:txBody>
+      </p:sp>
       <p:pic>
         <p:nvPicPr>
-          <p:cNvPr id="3" name="Image 0" descr="/home/claude/f4/img/minesec_sheet.png">    </p:cNvPr>
+          <p:cNvPr id="5" name="Image 0" descr="/home/claude/f4/img/v2/f2t_desert_plants.jpg">    </p:cNvPr>
           <p:cNvPicPr>
             <a:picLocks noChangeAspect="1"/>
           </p:cNvPicPr>
@@ -13410,8 +13764,8 @@
         </p:blipFill>
         <p:spPr>
           <a:xfrm>
-            <a:off x="0" y="658368"/>
-            <a:ext cx="3840480" cy="5833872"/>
+            <a:off x="5349240" y="2071212"/>
+            <a:ext cx="6659575" cy="3693983"/>
           </a:xfrm>
           <a:prstGeom prst="rect">
             <a:avLst/>
@@ -13420,14 +13774,14 @@
       </p:pic>
       <p:sp>
         <p:nvSpPr>
-          <p:cNvPr id="4" name="Text 1"/>
+          <p:cNvPr id="6" name="Text 3"/>
           <p:cNvSpPr/>
           <p:nvPr/>
         </p:nvSpPr>
         <p:spPr>
           <a:xfrm>
-            <a:off x="4069080" y="1005840"/>
-            <a:ext cx="7802575" cy="731520"/>
+            <a:off x="5349240" y="6089904"/>
+            <a:ext cx="6659575" cy="347472"/>
           </a:xfrm>
           <a:prstGeom prst="rect">
             <a:avLst/>
@@ -13436,142 +13790,24 @@
           <a:ln/>
         </p:spPr>
         <p:txBody>
-          <a:bodyPr wrap="square" lIns="0" tIns="0" rIns="0" bIns="0" rtlCol="0" anchor="ctr">
-            <a:normAutofit/>
-          </a:bodyPr>
+          <a:bodyPr wrap="square" lIns="0" tIns="0" rIns="0" bIns="0" rtlCol="0" anchor="ctr"/>
           <a:lstStyle/>
           <a:p>
             <a:pPr algn="ctr" indent="0" marL="0">
               <a:buNone/>
             </a:pPr>
             <a:r>
-              <a:rPr lang="en-US" sz="3600" b="1" dirty="0">
-                <a:solidFill>
-                  <a:srgbClr val="990011"/>
+              <a:rPr lang="en-US" sz="1600" i="1" dirty="0">
+                <a:solidFill>
+                  <a:srgbClr val="555555"/>
                 </a:solidFill>
                 <a:latin typeface="Times New Roman" pitchFamily="34" charset="0"/>
                 <a:ea typeface="Times New Roman" pitchFamily="34" charset="-122"/>
                 <a:cs typeface="Times New Roman" pitchFamily="34" charset="-120"/>
               </a:rPr>
-              <a:t>1. Vegetation</a:t>
-            </a:r>
-            <a:endParaRPr lang="en-US" sz="3600" dirty="0"/>
-          </a:p>
-        </p:txBody>
-      </p:sp>
-      <p:sp>
-        <p:nvSpPr>
-          <p:cNvPr id="5" name="Text 2"/>
-          <p:cNvSpPr/>
-          <p:nvPr/>
-        </p:nvSpPr>
-        <p:spPr>
-          <a:xfrm>
-            <a:off x="4069080" y="1783080"/>
-            <a:ext cx="7802575" cy="4663440"/>
-          </a:xfrm>
-          <a:prstGeom prst="rect">
-            <a:avLst/>
-          </a:prstGeom>
-          <a:noFill/>
-          <a:ln/>
-        </p:spPr>
-        <p:txBody>
-          <a:bodyPr wrap="square" lIns="0" tIns="0" rIns="0" bIns="0" rtlCol="0" anchor="t"/>
-          <a:lstStyle/>
-          <a:p>
-            <a:pPr algn="l" indent="0" marL="0">
-              <a:spcAft>
-                <a:spcPts val="800"/>
-              </a:spcAft>
-              <a:buNone/>
-            </a:pPr>
-            <a:r>
-              <a:rPr lang="en-US" sz="4000" i="1" dirty="0">
-                <a:solidFill>
-                  <a:srgbClr val="111111"/>
-                </a:solidFill>
-                <a:latin typeface="Times New Roman" pitchFamily="34" charset="0"/>
-                <a:ea typeface="Times New Roman" pitchFamily="34" charset="-122"/>
-                <a:cs typeface="Times New Roman" pitchFamily="34" charset="-120"/>
-              </a:rPr>
-              <a:t>Desert plants are few, and they are adapted in the following ways:</a:t>
-            </a:r>
-            <a:endParaRPr lang="en-US" sz="4000" dirty="0"/>
-          </a:p>
-          <a:p>
-            <a:pPr algn="l" indent="0" marL="0">
-              <a:spcAft>
-                <a:spcPts val="800"/>
-              </a:spcAft>
-              <a:buNone/>
-            </a:pPr>
-            <a:r>
-              <a:rPr lang="en-US" sz="4000" b="1" dirty="0">
-                <a:solidFill>
-                  <a:srgbClr val="111111"/>
-                </a:solidFill>
-                <a:latin typeface="Times New Roman" pitchFamily="34" charset="0"/>
-                <a:ea typeface="Times New Roman" pitchFamily="34" charset="-122"/>
-                <a:cs typeface="Times New Roman" pitchFamily="34" charset="-120"/>
-              </a:rPr>
-              <a:t>Water storage: </a:t>
-            </a:r>
-            <a:pPr algn="l" indent="0" marL="0">
-              <a:spcAft>
-                <a:spcPts val="800"/>
-              </a:spcAft>
-              <a:buNone/>
-            </a:pPr>
-            <a:r>
-              <a:rPr lang="en-US" sz="4000" dirty="0">
-                <a:solidFill>
-                  <a:srgbClr val="111111"/>
-                </a:solidFill>
-                <a:latin typeface="Times New Roman" pitchFamily="34" charset="0"/>
-                <a:ea typeface="Times New Roman" pitchFamily="34" charset="-122"/>
-                <a:cs typeface="Times New Roman" pitchFamily="34" charset="-120"/>
-              </a:rPr>
-              <a:t>The cactus stores water in its thick stem.</a:t>
-            </a:r>
-            <a:endParaRPr lang="en-US" sz="4000" dirty="0"/>
-          </a:p>
-          <a:p>
-            <a:pPr algn="l" indent="0" marL="0">
-              <a:spcAft>
-                <a:spcPts val="800"/>
-              </a:spcAft>
-              <a:buNone/>
-            </a:pPr>
-            <a:r>
-              <a:rPr lang="en-US" sz="4000" b="1" dirty="0">
-                <a:solidFill>
-                  <a:srgbClr val="111111"/>
-                </a:solidFill>
-                <a:latin typeface="Times New Roman" pitchFamily="34" charset="0"/>
-                <a:ea typeface="Times New Roman" pitchFamily="34" charset="-122"/>
-                <a:cs typeface="Times New Roman" pitchFamily="34" charset="-120"/>
-              </a:rPr>
-              <a:t>Small leaves or spines: </a:t>
-            </a:r>
-            <a:pPr algn="l" indent="0" marL="0">
-              <a:spcAft>
-                <a:spcPts val="800"/>
-              </a:spcAft>
-              <a:buNone/>
-            </a:pPr>
-            <a:r>
-              <a:rPr lang="en-US" sz="4000" dirty="0">
-                <a:solidFill>
-                  <a:srgbClr val="111111"/>
-                </a:solidFill>
-                <a:latin typeface="Times New Roman" pitchFamily="34" charset="0"/>
-                <a:ea typeface="Times New Roman" pitchFamily="34" charset="-122"/>
-                <a:cs typeface="Times New Roman" pitchFamily="34" charset="-120"/>
-              </a:rPr>
-              <a:t>Small leaves or spines lose very little water.</a:t>
-            </a:r>
-            <a:endParaRPr lang="en-US" sz="4000" dirty="0"/>
+              <a:t>Illustration: desert plants</a:t>
+            </a:r>
+            <a:endParaRPr lang="en-US" sz="1600" dirty="0"/>
           </a:p>
         </p:txBody>
       </p:sp>
@@ -13687,9 +13923,111 @@
           </a:p>
         </p:txBody>
       </p:sp>
+      <p:sp>
+        <p:nvSpPr>
+          <p:cNvPr id="3" name="Text 1"/>
+          <p:cNvSpPr/>
+          <p:nvPr/>
+        </p:nvSpPr>
+        <p:spPr>
+          <a:xfrm>
+            <a:off x="365760" y="1005840"/>
+            <a:ext cx="11460175" cy="731520"/>
+          </a:xfrm>
+          <a:prstGeom prst="rect">
+            <a:avLst/>
+          </a:prstGeom>
+          <a:noFill/>
+          <a:ln/>
+        </p:spPr>
+        <p:txBody>
+          <a:bodyPr wrap="square" lIns="0" tIns="0" rIns="0" bIns="0" rtlCol="0" anchor="ctr">
+            <a:normAutofit/>
+          </a:bodyPr>
+          <a:lstStyle/>
+          <a:p>
+            <a:pPr algn="ctr" indent="0" marL="0">
+              <a:buNone/>
+            </a:pPr>
+            <a:r>
+              <a:rPr lang="en-US" sz="3600" b="1" dirty="0">
+                <a:solidFill>
+                  <a:srgbClr val="990011"/>
+                </a:solidFill>
+                <a:latin typeface="Times New Roman" pitchFamily="34" charset="0"/>
+                <a:ea typeface="Times New Roman" pitchFamily="34" charset="-122"/>
+                <a:cs typeface="Times New Roman" pitchFamily="34" charset="-120"/>
+              </a:rPr>
+              <a:t>1. Vegetation</a:t>
+            </a:r>
+            <a:endParaRPr lang="en-US" sz="3600" dirty="0"/>
+          </a:p>
+        </p:txBody>
+      </p:sp>
+      <p:sp>
+        <p:nvSpPr>
+          <p:cNvPr id="4" name="Text 2"/>
+          <p:cNvSpPr/>
+          <p:nvPr/>
+        </p:nvSpPr>
+        <p:spPr>
+          <a:xfrm>
+            <a:off x="365760" y="1783080"/>
+            <a:ext cx="4846320" cy="4617720"/>
+          </a:xfrm>
+          <a:prstGeom prst="rect">
+            <a:avLst/>
+          </a:prstGeom>
+          <a:noFill/>
+          <a:ln/>
+        </p:spPr>
+        <p:txBody>
+          <a:bodyPr wrap="square" lIns="0" tIns="0" rIns="0" bIns="0" rtlCol="0" anchor="t"/>
+          <a:lstStyle/>
+          <a:p>
+            <a:pPr algn="l" marL="342900" indent="-342900">
+              <a:spcAft>
+                <a:spcPts val="800"/>
+              </a:spcAft>
+              <a:buSzPct val="100000"/>
+              <a:buChar char="•"/>
+            </a:pPr>
+            <a:r>
+              <a:rPr lang="en-US" sz="3600" b="1" dirty="0">
+                <a:solidFill>
+                  <a:srgbClr val="111111"/>
+                </a:solidFill>
+                <a:latin typeface="Times New Roman" pitchFamily="34" charset="0"/>
+                <a:ea typeface="Times New Roman" pitchFamily="34" charset="-122"/>
+                <a:cs typeface="Times New Roman" pitchFamily="34" charset="-120"/>
+              </a:rPr>
+              <a:t>Water storage: </a:t>
+            </a:r>
+            <a:pPr algn="l" marL="342900" indent="-342900">
+              <a:spcAft>
+                <a:spcPts val="800"/>
+              </a:spcAft>
+              <a:buSzPct val="100000"/>
+              <a:buChar char="•"/>
+            </a:pPr>
+            <a:r>
+              <a:rPr lang="en-US" sz="3600" dirty="0">
+                <a:solidFill>
+                  <a:srgbClr val="111111"/>
+                </a:solidFill>
+                <a:latin typeface="Times New Roman" pitchFamily="34" charset="0"/>
+                <a:ea typeface="Times New Roman" pitchFamily="34" charset="-122"/>
+                <a:cs typeface="Times New Roman" pitchFamily="34" charset="-120"/>
+              </a:rPr>
+              <a:t>Cacti store water in thick stems.</a:t>
+            </a:r>
+            <a:endParaRPr lang="en-US" sz="3600" dirty="0"/>
+          </a:p>
+        </p:txBody>
+      </p:sp>
       <p:pic>
         <p:nvPicPr>
-          <p:cNvPr id="3" name="Image 0" descr="/home/claude/f4/img/minesec_sheet.png">    </p:cNvPr>
+          <p:cNvPr id="5" name="Image 0" descr="/home/claude/f4/img/v2/f2t_cactus.jpg">    </p:cNvPr>
           <p:cNvPicPr>
             <a:picLocks noChangeAspect="1"/>
           </p:cNvPicPr>
@@ -13703,8 +14041,8 @@
         </p:blipFill>
         <p:spPr>
           <a:xfrm>
-            <a:off x="0" y="658368"/>
-            <a:ext cx="5120640" cy="5833872"/>
+            <a:off x="5349240" y="2071212"/>
+            <a:ext cx="6659575" cy="3693983"/>
           </a:xfrm>
           <a:prstGeom prst="rect">
             <a:avLst/>
@@ -13713,14 +14051,14 @@
       </p:pic>
       <p:sp>
         <p:nvSpPr>
-          <p:cNvPr id="4" name="Text 1"/>
+          <p:cNvPr id="6" name="Text 3"/>
           <p:cNvSpPr/>
           <p:nvPr/>
         </p:nvSpPr>
         <p:spPr>
           <a:xfrm>
-            <a:off x="5349240" y="1005840"/>
-            <a:ext cx="6522415" cy="731520"/>
+            <a:off x="5349240" y="6089904"/>
+            <a:ext cx="6659575" cy="347472"/>
           </a:xfrm>
           <a:prstGeom prst="rect">
             <a:avLst/>
@@ -13729,122 +14067,24 @@
           <a:ln/>
         </p:spPr>
         <p:txBody>
-          <a:bodyPr wrap="square" lIns="0" tIns="0" rIns="0" bIns="0" rtlCol="0" anchor="ctr">
-            <a:normAutofit/>
-          </a:bodyPr>
+          <a:bodyPr wrap="square" lIns="0" tIns="0" rIns="0" bIns="0" rtlCol="0" anchor="ctr"/>
           <a:lstStyle/>
           <a:p>
             <a:pPr algn="ctr" indent="0" marL="0">
               <a:buNone/>
             </a:pPr>
             <a:r>
-              <a:rPr lang="en-US" sz="3600" b="1" dirty="0">
-                <a:solidFill>
-                  <a:srgbClr val="990011"/>
+              <a:rPr lang="en-US" sz="1600" i="1" dirty="0">
+                <a:solidFill>
+                  <a:srgbClr val="555555"/>
                 </a:solidFill>
                 <a:latin typeface="Times New Roman" pitchFamily="34" charset="0"/>
                 <a:ea typeface="Times New Roman" pitchFamily="34" charset="-122"/>
                 <a:cs typeface="Times New Roman" pitchFamily="34" charset="-120"/>
               </a:rPr>
-              <a:t>1. Vegetation (continued)</a:t>
-            </a:r>
-            <a:endParaRPr lang="en-US" sz="3600" dirty="0"/>
-          </a:p>
-        </p:txBody>
-      </p:sp>
-      <p:sp>
-        <p:nvSpPr>
-          <p:cNvPr id="5" name="Text 2"/>
-          <p:cNvSpPr/>
-          <p:nvPr/>
-        </p:nvSpPr>
-        <p:spPr>
-          <a:xfrm>
-            <a:off x="5349240" y="1783080"/>
-            <a:ext cx="6522415" cy="4663440"/>
-          </a:xfrm>
-          <a:prstGeom prst="rect">
-            <a:avLst/>
-          </a:prstGeom>
-          <a:noFill/>
-          <a:ln/>
-        </p:spPr>
-        <p:txBody>
-          <a:bodyPr wrap="square" lIns="0" tIns="0" rIns="0" bIns="0" rtlCol="0" anchor="t"/>
-          <a:lstStyle/>
-          <a:p>
-            <a:pPr algn="l" indent="0" marL="0">
-              <a:spcAft>
-                <a:spcPts val="800"/>
-              </a:spcAft>
-              <a:buNone/>
-            </a:pPr>
-            <a:r>
-              <a:rPr lang="en-US" sz="4000" b="1" dirty="0">
-                <a:solidFill>
-                  <a:srgbClr val="111111"/>
-                </a:solidFill>
-                <a:latin typeface="Times New Roman" pitchFamily="34" charset="0"/>
-                <a:ea typeface="Times New Roman" pitchFamily="34" charset="-122"/>
-                <a:cs typeface="Times New Roman" pitchFamily="34" charset="-120"/>
-              </a:rPr>
-              <a:t>Long roots: </a:t>
-            </a:r>
-            <a:pPr algn="l" indent="0" marL="0">
-              <a:spcAft>
-                <a:spcPts val="800"/>
-              </a:spcAft>
-              <a:buNone/>
-            </a:pPr>
-            <a:r>
-              <a:rPr lang="en-US" sz="4000" dirty="0">
-                <a:solidFill>
-                  <a:srgbClr val="111111"/>
-                </a:solidFill>
-                <a:latin typeface="Times New Roman" pitchFamily="34" charset="0"/>
-                <a:ea typeface="Times New Roman" pitchFamily="34" charset="-122"/>
-                <a:cs typeface="Times New Roman" pitchFamily="34" charset="-120"/>
-              </a:rPr>
-              <a:t>Long roots reach water deep in the ground.</a:t>
-            </a:r>
-            <a:endParaRPr lang="en-US" sz="4000" dirty="0"/>
-          </a:p>
-          <a:p>
-            <a:pPr algn="l" indent="0" marL="0">
-              <a:spcAft>
-                <a:spcPts val="800"/>
-              </a:spcAft>
-              <a:buNone/>
-            </a:pPr>
-            <a:r>
-              <a:rPr lang="en-US" sz="4000" b="1" dirty="0">
-                <a:solidFill>
-                  <a:srgbClr val="111111"/>
-                </a:solidFill>
-                <a:latin typeface="Times New Roman" pitchFamily="34" charset="0"/>
-                <a:ea typeface="Times New Roman" pitchFamily="34" charset="-122"/>
-                <a:cs typeface="Times New Roman" pitchFamily="34" charset="-120"/>
-              </a:rPr>
-              <a:t>Short life: </a:t>
-            </a:r>
-            <a:pPr algn="l" indent="0" marL="0">
-              <a:spcAft>
-                <a:spcPts val="800"/>
-              </a:spcAft>
-              <a:buNone/>
-            </a:pPr>
-            <a:r>
-              <a:rPr lang="en-US" sz="4000" dirty="0">
-                <a:solidFill>
-                  <a:srgbClr val="111111"/>
-                </a:solidFill>
-                <a:latin typeface="Times New Roman" pitchFamily="34" charset="0"/>
-                <a:ea typeface="Times New Roman" pitchFamily="34" charset="-122"/>
-                <a:cs typeface="Times New Roman" pitchFamily="34" charset="-120"/>
-              </a:rPr>
-              <a:t>Some plants grow, flower and die quickly after rain.</a:t>
-            </a:r>
-            <a:endParaRPr lang="en-US" sz="4000" dirty="0"/>
+              <a:t>Illustration: a cactus</a:t>
+            </a:r>
+            <a:endParaRPr lang="en-US" sz="1600" dirty="0"/>
           </a:p>
         </p:txBody>
       </p:sp>
@@ -13960,9 +14200,111 @@
           </a:p>
         </p:txBody>
       </p:sp>
+      <p:sp>
+        <p:nvSpPr>
+          <p:cNvPr id="3" name="Text 1"/>
+          <p:cNvSpPr/>
+          <p:nvPr/>
+        </p:nvSpPr>
+        <p:spPr>
+          <a:xfrm>
+            <a:off x="365760" y="1005840"/>
+            <a:ext cx="11460175" cy="731520"/>
+          </a:xfrm>
+          <a:prstGeom prst="rect">
+            <a:avLst/>
+          </a:prstGeom>
+          <a:noFill/>
+          <a:ln/>
+        </p:spPr>
+        <p:txBody>
+          <a:bodyPr wrap="square" lIns="0" tIns="0" rIns="0" bIns="0" rtlCol="0" anchor="ctr">
+            <a:normAutofit/>
+          </a:bodyPr>
+          <a:lstStyle/>
+          <a:p>
+            <a:pPr algn="ctr" indent="0" marL="0">
+              <a:buNone/>
+            </a:pPr>
+            <a:r>
+              <a:rPr lang="en-US" sz="3600" b="1" dirty="0">
+                <a:solidFill>
+                  <a:srgbClr val="990011"/>
+                </a:solidFill>
+                <a:latin typeface="Times New Roman" pitchFamily="34" charset="0"/>
+                <a:ea typeface="Times New Roman" pitchFamily="34" charset="-122"/>
+                <a:cs typeface="Times New Roman" pitchFamily="34" charset="-120"/>
+              </a:rPr>
+              <a:t>1. Vegetation</a:t>
+            </a:r>
+            <a:endParaRPr lang="en-US" sz="3600" dirty="0"/>
+          </a:p>
+        </p:txBody>
+      </p:sp>
+      <p:sp>
+        <p:nvSpPr>
+          <p:cNvPr id="4" name="Text 2"/>
+          <p:cNvSpPr/>
+          <p:nvPr/>
+        </p:nvSpPr>
+        <p:spPr>
+          <a:xfrm>
+            <a:off x="365760" y="1783080"/>
+            <a:ext cx="4846320" cy="4617720"/>
+          </a:xfrm>
+          <a:prstGeom prst="rect">
+            <a:avLst/>
+          </a:prstGeom>
+          <a:noFill/>
+          <a:ln/>
+        </p:spPr>
+        <p:txBody>
+          <a:bodyPr wrap="square" lIns="0" tIns="0" rIns="0" bIns="0" rtlCol="0" anchor="t"/>
+          <a:lstStyle/>
+          <a:p>
+            <a:pPr algn="l" marL="342900" indent="-342900">
+              <a:spcAft>
+                <a:spcPts val="800"/>
+              </a:spcAft>
+              <a:buSzPct val="100000"/>
+              <a:buChar char="•"/>
+            </a:pPr>
+            <a:r>
+              <a:rPr lang="en-US" sz="3600" b="1" dirty="0">
+                <a:solidFill>
+                  <a:srgbClr val="111111"/>
+                </a:solidFill>
+                <a:latin typeface="Times New Roman" pitchFamily="34" charset="0"/>
+                <a:ea typeface="Times New Roman" pitchFamily="34" charset="-122"/>
+                <a:cs typeface="Times New Roman" pitchFamily="34" charset="-120"/>
+              </a:rPr>
+              <a:t>Long roots: </a:t>
+            </a:r>
+            <a:pPr algn="l" marL="342900" indent="-342900">
+              <a:spcAft>
+                <a:spcPts val="800"/>
+              </a:spcAft>
+              <a:buSzPct val="100000"/>
+              <a:buChar char="•"/>
+            </a:pPr>
+            <a:r>
+              <a:rPr lang="en-US" sz="3600" dirty="0">
+                <a:solidFill>
+                  <a:srgbClr val="111111"/>
+                </a:solidFill>
+                <a:latin typeface="Times New Roman" pitchFamily="34" charset="0"/>
+                <a:ea typeface="Times New Roman" pitchFamily="34" charset="-122"/>
+                <a:cs typeface="Times New Roman" pitchFamily="34" charset="-120"/>
+              </a:rPr>
+              <a:t>Roots go deep to find water.</a:t>
+            </a:r>
+            <a:endParaRPr lang="en-US" sz="3600" dirty="0"/>
+          </a:p>
+        </p:txBody>
+      </p:sp>
       <p:pic>
         <p:nvPicPr>
-          <p:cNvPr id="3" name="Image 0" descr="/home/claude/f4/img/minesec_sheet.png">    </p:cNvPr>
+          <p:cNvPr id="5" name="Image 0" descr="/home/claude/f4/img/v2/desert_roots_big.png">    </p:cNvPr>
           <p:cNvPicPr>
             <a:picLocks noChangeAspect="1"/>
           </p:cNvPicPr>
@@ -13976,8 +14318,8 @@
         </p:blipFill>
         <p:spPr>
           <a:xfrm>
-            <a:off x="0" y="658368"/>
-            <a:ext cx="2468880" cy="5833872"/>
+            <a:off x="5349240" y="2617506"/>
+            <a:ext cx="6659575" cy="2601397"/>
           </a:xfrm>
           <a:prstGeom prst="rect">
             <a:avLst/>
@@ -13986,14 +14328,14 @@
       </p:pic>
       <p:sp>
         <p:nvSpPr>
-          <p:cNvPr id="4" name="Text 1"/>
+          <p:cNvPr id="6" name="Text 3"/>
           <p:cNvSpPr/>
           <p:nvPr/>
         </p:nvSpPr>
         <p:spPr>
           <a:xfrm>
-            <a:off x="2697480" y="1005840"/>
-            <a:ext cx="9174175" cy="731520"/>
+            <a:off x="5349240" y="6089904"/>
+            <a:ext cx="6659575" cy="347472"/>
           </a:xfrm>
           <a:prstGeom prst="rect">
             <a:avLst/>
@@ -14002,142 +14344,24 @@
           <a:ln/>
         </p:spPr>
         <p:txBody>
-          <a:bodyPr wrap="square" lIns="0" tIns="0" rIns="0" bIns="0" rtlCol="0" anchor="ctr">
-            <a:normAutofit/>
-          </a:bodyPr>
+          <a:bodyPr wrap="square" lIns="0" tIns="0" rIns="0" bIns="0" rtlCol="0" anchor="ctr"/>
           <a:lstStyle/>
           <a:p>
             <a:pPr algn="ctr" indent="0" marL="0">
               <a:buNone/>
             </a:pPr>
             <a:r>
-              <a:rPr lang="en-US" sz="3600" b="1" dirty="0">
-                <a:solidFill>
-                  <a:srgbClr val="990011"/>
+              <a:rPr lang="en-US" sz="1600" i="1" dirty="0">
+                <a:solidFill>
+                  <a:srgbClr val="555555"/>
                 </a:solidFill>
                 <a:latin typeface="Times New Roman" pitchFamily="34" charset="0"/>
                 <a:ea typeface="Times New Roman" pitchFamily="34" charset="-122"/>
                 <a:cs typeface="Times New Roman" pitchFamily="34" charset="-120"/>
               </a:rPr>
-              <a:t>2. Soils</a:t>
-            </a:r>
-            <a:endParaRPr lang="en-US" sz="3600" dirty="0"/>
-          </a:p>
-        </p:txBody>
-      </p:sp>
-      <p:sp>
-        <p:nvSpPr>
-          <p:cNvPr id="5" name="Text 2"/>
-          <p:cNvSpPr/>
-          <p:nvPr/>
-        </p:nvSpPr>
-        <p:spPr>
-          <a:xfrm>
-            <a:off x="2697480" y="1783080"/>
-            <a:ext cx="9174175" cy="4663440"/>
-          </a:xfrm>
-          <a:prstGeom prst="rect">
-            <a:avLst/>
-          </a:prstGeom>
-          <a:noFill/>
-          <a:ln/>
-        </p:spPr>
-        <p:txBody>
-          <a:bodyPr wrap="square" lIns="0" tIns="0" rIns="0" bIns="0" rtlCol="0" anchor="t"/>
-          <a:lstStyle/>
-          <a:p>
-            <a:pPr algn="l" indent="0" marL="0">
-              <a:spcAft>
-                <a:spcPts val="800"/>
-              </a:spcAft>
-              <a:buNone/>
-            </a:pPr>
-            <a:r>
-              <a:rPr lang="en-US" sz="4000" i="1" dirty="0">
-                <a:solidFill>
-                  <a:srgbClr val="111111"/>
-                </a:solidFill>
-                <a:latin typeface="Times New Roman" pitchFamily="34" charset="0"/>
-                <a:ea typeface="Times New Roman" pitchFamily="34" charset="-122"/>
-                <a:cs typeface="Times New Roman" pitchFamily="34" charset="-120"/>
-              </a:rPr>
-              <a:t>Desert soils have the following characteristics:</a:t>
-            </a:r>
-            <a:endParaRPr lang="en-US" sz="4000" dirty="0"/>
-          </a:p>
-          <a:p>
-            <a:pPr algn="l" indent="0" marL="0">
-              <a:spcAft>
-                <a:spcPts val="800"/>
-              </a:spcAft>
-              <a:buNone/>
-            </a:pPr>
-            <a:r>
-              <a:rPr lang="en-US" sz="4000" b="1" dirty="0">
-                <a:solidFill>
-                  <a:srgbClr val="111111"/>
-                </a:solidFill>
-                <a:latin typeface="Times New Roman" pitchFamily="34" charset="0"/>
-                <a:ea typeface="Times New Roman" pitchFamily="34" charset="-122"/>
-                <a:cs typeface="Times New Roman" pitchFamily="34" charset="-120"/>
-              </a:rPr>
-              <a:t>Sandy or stony soils: </a:t>
-            </a:r>
-            <a:pPr algn="l" indent="0" marL="0">
-              <a:spcAft>
-                <a:spcPts val="800"/>
-              </a:spcAft>
-              <a:buNone/>
-            </a:pPr>
-            <a:r>
-              <a:rPr lang="en-US" sz="4000" dirty="0">
-                <a:solidFill>
-                  <a:srgbClr val="111111"/>
-                </a:solidFill>
-                <a:latin typeface="Times New Roman" pitchFamily="34" charset="0"/>
-                <a:ea typeface="Times New Roman" pitchFamily="34" charset="-122"/>
-                <a:cs typeface="Times New Roman" pitchFamily="34" charset="-120"/>
-              </a:rPr>
-              <a:t>Sandy and stony soils keep very little water.</a:t>
-            </a:r>
-            <a:endParaRPr lang="en-US" sz="4000" dirty="0"/>
-          </a:p>
-          <a:p>
-            <a:pPr algn="l" indent="0" marL="0">
-              <a:spcAft>
-                <a:spcPts val="800"/>
-              </a:spcAft>
-              <a:buNone/>
-            </a:pPr>
-            <a:r>
-              <a:rPr lang="en-US" sz="4000" b="1" dirty="0">
-                <a:solidFill>
-                  <a:srgbClr val="111111"/>
-                </a:solidFill>
-                <a:latin typeface="Times New Roman" pitchFamily="34" charset="0"/>
-                <a:ea typeface="Times New Roman" pitchFamily="34" charset="-122"/>
-                <a:cs typeface="Times New Roman" pitchFamily="34" charset="-120"/>
-              </a:rPr>
-              <a:t>Little humus: </a:t>
-            </a:r>
-            <a:pPr algn="l" indent="0" marL="0">
-              <a:spcAft>
-                <a:spcPts val="800"/>
-              </a:spcAft>
-              <a:buNone/>
-            </a:pPr>
-            <a:r>
-              <a:rPr lang="en-US" sz="4000" dirty="0">
-                <a:solidFill>
-                  <a:srgbClr val="111111"/>
-                </a:solidFill>
-                <a:latin typeface="Times New Roman" pitchFamily="34" charset="0"/>
-                <a:ea typeface="Times New Roman" pitchFamily="34" charset="-122"/>
-                <a:cs typeface="Times New Roman" pitchFamily="34" charset="-120"/>
-              </a:rPr>
-              <a:t>The soils have little humus because there are few plants.</a:t>
-            </a:r>
-            <a:endParaRPr lang="en-US" sz="4000" dirty="0"/>
+              <a:t>Illustration: long roots</a:t>
+            </a:r>
+            <a:endParaRPr lang="en-US" sz="1600" dirty="0"/>
           </a:p>
         </p:txBody>
       </p:sp>
@@ -14312,7 +14536,7 @@
                 <a:ea typeface="Times New Roman" pitchFamily="34" charset="-122"/>
                 <a:cs typeface="Times New Roman" pitchFamily="34" charset="-120"/>
               </a:rPr>
-              <a:t>2. Soils (continued)</a:t>
+              <a:t>1. Vegetation</a:t>
             </a:r>
             <a:endParaRPr lang="en-US" sz="3600" dirty="0"/>
           </a:p>
@@ -14339,11 +14563,12 @@
           <a:bodyPr wrap="square" lIns="0" tIns="0" rIns="0" bIns="0" rtlCol="0" anchor="t"/>
           <a:lstStyle/>
           <a:p>
-            <a:pPr algn="l" indent="0" marL="0">
+            <a:pPr algn="l" marL="342900" indent="-342900">
               <a:spcAft>
                 <a:spcPts val="800"/>
               </a:spcAft>
-              <a:buNone/>
+              <a:buSzPct val="100000"/>
+              <a:buChar char="•"/>
             </a:pPr>
             <a:r>
               <a:rPr lang="en-US" sz="4000" b="1" dirty="0">
@@ -14354,13 +14579,14 @@
                 <a:ea typeface="Times New Roman" pitchFamily="34" charset="-122"/>
                 <a:cs typeface="Times New Roman" pitchFamily="34" charset="-120"/>
               </a:rPr>
-              <a:t>Salty soils: </a:t>
-            </a:r>
-            <a:pPr algn="l" indent="0" marL="0">
+              <a:t>Small leaves or spines: </a:t>
+            </a:r>
+            <a:pPr algn="l" marL="342900" indent="-342900">
               <a:spcAft>
                 <a:spcPts val="800"/>
               </a:spcAft>
-              <a:buNone/>
+              <a:buSzPct val="100000"/>
+              <a:buChar char="•"/>
             </a:pPr>
             <a:r>
               <a:rPr lang="en-US" sz="4000" dirty="0">
@@ -14371,16 +14597,17 @@
                 <a:ea typeface="Times New Roman" pitchFamily="34" charset="-122"/>
                 <a:cs typeface="Times New Roman" pitchFamily="34" charset="-120"/>
               </a:rPr>
-              <a:t>The strong sun evaporates water and leaves salt on the surface.</a:t>
+              <a:t>They lose little water.</a:t>
             </a:r>
             <a:endParaRPr lang="en-US" sz="4000" dirty="0"/>
           </a:p>
           <a:p>
-            <a:pPr algn="l" indent="0" marL="0">
+            <a:pPr algn="l" marL="342900" indent="-342900">
               <a:spcAft>
                 <a:spcPts val="800"/>
               </a:spcAft>
-              <a:buNone/>
+              <a:buSzPct val="100000"/>
+              <a:buChar char="•"/>
             </a:pPr>
             <a:r>
               <a:rPr lang="en-US" sz="4000" b="1" dirty="0">
@@ -14391,13 +14618,14 @@
                 <a:ea typeface="Times New Roman" pitchFamily="34" charset="-122"/>
                 <a:cs typeface="Times New Roman" pitchFamily="34" charset="-120"/>
               </a:rPr>
-              <a:t>Fertile with water: </a:t>
-            </a:r>
-            <a:pPr algn="l" indent="0" marL="0">
+              <a:t>Short life cycle: </a:t>
+            </a:r>
+            <a:pPr algn="l" marL="342900" indent="-342900">
               <a:spcAft>
                 <a:spcPts val="800"/>
               </a:spcAft>
-              <a:buNone/>
+              <a:buSzPct val="100000"/>
+              <a:buChar char="•"/>
             </a:pPr>
             <a:r>
               <a:rPr lang="en-US" sz="4000" dirty="0">
@@ -14408,7 +14636,7 @@
                 <a:ea typeface="Times New Roman" pitchFamily="34" charset="-122"/>
                 <a:cs typeface="Times New Roman" pitchFamily="34" charset="-120"/>
               </a:rPr>
-              <a:t>Some desert soils become fertile when irrigated, as along the Nile.</a:t>
+              <a:t>Some plants grow and flower quickly after rain.</a:t>
             </a:r>
             <a:endParaRPr lang="en-US" sz="4000" dirty="0"/>
           </a:p>
@@ -14520,7 +14748,7 @@
                 <a:ea typeface="Calibri" pitchFamily="34" charset="-122"/>
                 <a:cs typeface="Calibri" pitchFamily="34" charset="-120"/>
               </a:rPr>
-              <a:t>FORMATIVE EVALUATION</a:t>
+              <a:t>BOARD SUMMARY</a:t>
             </a:r>
             <a:endParaRPr lang="en-US" sz="1400" dirty="0"/>
           </a:p>
@@ -14585,7 +14813,7 @@
                 <a:ea typeface="Times New Roman" pitchFamily="34" charset="-122"/>
                 <a:cs typeface="Times New Roman" pitchFamily="34" charset="-120"/>
               </a:rPr>
-              <a:t>Evaluation 1</a:t>
+              <a:t>2. Soils</a:t>
             </a:r>
             <a:endParaRPr lang="en-US" sz="3600" dirty="0"/>
           </a:p>
@@ -14619,7 +14847,7 @@
               <a:buNone/>
             </a:pPr>
             <a:r>
-              <a:rPr lang="en-US" sz="4000" dirty="0">
+              <a:rPr lang="en-US" sz="4000" i="1" dirty="0">
                 <a:solidFill>
                   <a:srgbClr val="111111"/>
                 </a:solidFill>
@@ -14627,7 +14855,85 @@
                 <a:ea typeface="Times New Roman" pitchFamily="34" charset="-122"/>
                 <a:cs typeface="Times New Roman" pitchFamily="34" charset="-120"/>
               </a:rPr>
-              <a:t>Give two ways desert plants are adapted.</a:t>
+              <a:t>Desert soils have the following characteristics:</a:t>
+            </a:r>
+            <a:endParaRPr lang="en-US" sz="4000" dirty="0"/>
+          </a:p>
+          <a:p>
+            <a:pPr algn="l" marL="342900" indent="-342900">
+              <a:spcAft>
+                <a:spcPts val="800"/>
+              </a:spcAft>
+              <a:buSzPct val="100000"/>
+              <a:buChar char="•"/>
+            </a:pPr>
+            <a:r>
+              <a:rPr lang="en-US" sz="4000" b="1" dirty="0">
+                <a:solidFill>
+                  <a:srgbClr val="111111"/>
+                </a:solidFill>
+                <a:latin typeface="Times New Roman" pitchFamily="34" charset="0"/>
+                <a:ea typeface="Times New Roman" pitchFamily="34" charset="-122"/>
+                <a:cs typeface="Times New Roman" pitchFamily="34" charset="-120"/>
+              </a:rPr>
+              <a:t>Sandy or stony: </a:t>
+            </a:r>
+            <a:pPr algn="l" marL="342900" indent="-342900">
+              <a:spcAft>
+                <a:spcPts val="800"/>
+              </a:spcAft>
+              <a:buSzPct val="100000"/>
+              <a:buChar char="•"/>
+            </a:pPr>
+            <a:r>
+              <a:rPr lang="en-US" sz="4000" dirty="0">
+                <a:solidFill>
+                  <a:srgbClr val="111111"/>
+                </a:solidFill>
+                <a:latin typeface="Times New Roman" pitchFamily="34" charset="0"/>
+                <a:ea typeface="Times New Roman" pitchFamily="34" charset="-122"/>
+                <a:cs typeface="Times New Roman" pitchFamily="34" charset="-120"/>
+              </a:rPr>
+              <a:t>The soils are made of sand, gravel and rock.</a:t>
+            </a:r>
+            <a:endParaRPr lang="en-US" sz="4000" dirty="0"/>
+          </a:p>
+          <a:p>
+            <a:pPr algn="l" marL="342900" indent="-342900">
+              <a:spcAft>
+                <a:spcPts val="800"/>
+              </a:spcAft>
+              <a:buSzPct val="100000"/>
+              <a:buChar char="•"/>
+            </a:pPr>
+            <a:r>
+              <a:rPr lang="en-US" sz="4000" b="1" dirty="0">
+                <a:solidFill>
+                  <a:srgbClr val="111111"/>
+                </a:solidFill>
+                <a:latin typeface="Times New Roman" pitchFamily="34" charset="0"/>
+                <a:ea typeface="Times New Roman" pitchFamily="34" charset="-122"/>
+                <a:cs typeface="Times New Roman" pitchFamily="34" charset="-120"/>
+              </a:rPr>
+              <a:t>Little humus: </a:t>
+            </a:r>
+            <a:pPr algn="l" marL="342900" indent="-342900">
+              <a:spcAft>
+                <a:spcPts val="800"/>
+              </a:spcAft>
+              <a:buSzPct val="100000"/>
+              <a:buChar char="•"/>
+            </a:pPr>
+            <a:r>
+              <a:rPr lang="en-US" sz="4000" dirty="0">
+                <a:solidFill>
+                  <a:srgbClr val="111111"/>
+                </a:solidFill>
+                <a:latin typeface="Times New Roman" pitchFamily="34" charset="0"/>
+                <a:ea typeface="Times New Roman" pitchFamily="34" charset="-122"/>
+                <a:cs typeface="Times New Roman" pitchFamily="34" charset="-120"/>
+              </a:rPr>
+              <a:t>There are few plants to rot.</a:t>
             </a:r>
             <a:endParaRPr lang="en-US" sz="4000" dirty="0"/>
           </a:p>
@@ -14978,15 +15284,117 @@
                 <a:ea typeface="Calibri" pitchFamily="34" charset="-122"/>
                 <a:cs typeface="Calibri" pitchFamily="34" charset="-120"/>
               </a:rPr>
-              <a:t>FORMATIVE EVALUATION</a:t>
+              <a:t>BOARD SUMMARY</a:t>
             </a:r>
             <a:endParaRPr lang="en-US" sz="1400" dirty="0"/>
+          </a:p>
+        </p:txBody>
+      </p:sp>
+      <p:sp>
+        <p:nvSpPr>
+          <p:cNvPr id="3" name="Text 1"/>
+          <p:cNvSpPr/>
+          <p:nvPr/>
+        </p:nvSpPr>
+        <p:spPr>
+          <a:xfrm>
+            <a:off x="365760" y="1005840"/>
+            <a:ext cx="11460175" cy="731520"/>
+          </a:xfrm>
+          <a:prstGeom prst="rect">
+            <a:avLst/>
+          </a:prstGeom>
+          <a:noFill/>
+          <a:ln/>
+        </p:spPr>
+        <p:txBody>
+          <a:bodyPr wrap="square" lIns="0" tIns="0" rIns="0" bIns="0" rtlCol="0" anchor="ctr">
+            <a:normAutofit/>
+          </a:bodyPr>
+          <a:lstStyle/>
+          <a:p>
+            <a:pPr algn="ctr" indent="0" marL="0">
+              <a:buNone/>
+            </a:pPr>
+            <a:r>
+              <a:rPr lang="en-US" sz="3600" b="1" dirty="0">
+                <a:solidFill>
+                  <a:srgbClr val="990011"/>
+                </a:solidFill>
+                <a:latin typeface="Times New Roman" pitchFamily="34" charset="0"/>
+                <a:ea typeface="Times New Roman" pitchFamily="34" charset="-122"/>
+                <a:cs typeface="Times New Roman" pitchFamily="34" charset="-120"/>
+              </a:rPr>
+              <a:t>2. Soils</a:t>
+            </a:r>
+            <a:endParaRPr lang="en-US" sz="3600" dirty="0"/>
+          </a:p>
+        </p:txBody>
+      </p:sp>
+      <p:sp>
+        <p:nvSpPr>
+          <p:cNvPr id="4" name="Text 2"/>
+          <p:cNvSpPr/>
+          <p:nvPr/>
+        </p:nvSpPr>
+        <p:spPr>
+          <a:xfrm>
+            <a:off x="365760" y="1783080"/>
+            <a:ext cx="4846320" cy="4617720"/>
+          </a:xfrm>
+          <a:prstGeom prst="rect">
+            <a:avLst/>
+          </a:prstGeom>
+          <a:noFill/>
+          <a:ln/>
+        </p:spPr>
+        <p:txBody>
+          <a:bodyPr wrap="square" lIns="0" tIns="0" rIns="0" bIns="0" rtlCol="0" anchor="t"/>
+          <a:lstStyle/>
+          <a:p>
+            <a:pPr algn="l" marL="342900" indent="-342900">
+              <a:spcAft>
+                <a:spcPts val="800"/>
+              </a:spcAft>
+              <a:buSzPct val="100000"/>
+              <a:buChar char="•"/>
+            </a:pPr>
+            <a:r>
+              <a:rPr lang="en-US" sz="3600" b="1" dirty="0">
+                <a:solidFill>
+                  <a:srgbClr val="111111"/>
+                </a:solidFill>
+                <a:latin typeface="Times New Roman" pitchFamily="34" charset="0"/>
+                <a:ea typeface="Times New Roman" pitchFamily="34" charset="-122"/>
+                <a:cs typeface="Times New Roman" pitchFamily="34" charset="-120"/>
+              </a:rPr>
+              <a:t>Salty crusts: </a:t>
+            </a:r>
+            <a:pPr algn="l" marL="342900" indent="-342900">
+              <a:spcAft>
+                <a:spcPts val="800"/>
+              </a:spcAft>
+              <a:buSzPct val="100000"/>
+              <a:buChar char="•"/>
+            </a:pPr>
+            <a:r>
+              <a:rPr lang="en-US" sz="3600" dirty="0">
+                <a:solidFill>
+                  <a:srgbClr val="111111"/>
+                </a:solidFill>
+                <a:latin typeface="Times New Roman" pitchFamily="34" charset="0"/>
+                <a:ea typeface="Times New Roman" pitchFamily="34" charset="-122"/>
+                <a:cs typeface="Times New Roman" pitchFamily="34" charset="-120"/>
+              </a:rPr>
+              <a:t>The sun dries the soil and leaves salt.</a:t>
+            </a:r>
+            <a:endParaRPr lang="en-US" sz="3600" dirty="0"/>
           </a:p>
         </p:txBody>
       </p:sp>
       <p:pic>
         <p:nvPicPr>
-          <p:cNvPr id="3" name="Image 0" descr="/home/claude/f4/img/minesec_sheet.png">    </p:cNvPr>
+          <p:cNvPr id="5" name="Image 0" descr="/home/claude/f4/img/v2/f2t_salt_crust.jpg">    </p:cNvPr>
           <p:cNvPicPr>
             <a:picLocks noChangeAspect="1"/>
           </p:cNvPicPr>
@@ -15000,8 +15408,8 @@
         </p:blipFill>
         <p:spPr>
           <a:xfrm>
-            <a:off x="0" y="658368"/>
-            <a:ext cx="5120640" cy="5833872"/>
+            <a:off x="5349240" y="2071212"/>
+            <a:ext cx="6659575" cy="3693983"/>
           </a:xfrm>
           <a:prstGeom prst="rect">
             <a:avLst/>
@@ -15010,14 +15418,14 @@
       </p:pic>
       <p:sp>
         <p:nvSpPr>
-          <p:cNvPr id="4" name="Text 1"/>
+          <p:cNvPr id="6" name="Text 3"/>
           <p:cNvSpPr/>
           <p:nvPr/>
         </p:nvSpPr>
         <p:spPr>
           <a:xfrm>
-            <a:off x="5349240" y="1005840"/>
-            <a:ext cx="6522415" cy="731520"/>
+            <a:off x="5349240" y="6089904"/>
+            <a:ext cx="6659575" cy="347472"/>
           </a:xfrm>
           <a:prstGeom prst="rect">
             <a:avLst/>
@@ -15026,68 +15434,24 @@
           <a:ln/>
         </p:spPr>
         <p:txBody>
-          <a:bodyPr wrap="square" lIns="0" tIns="0" rIns="0" bIns="0" rtlCol="0" anchor="ctr">
-            <a:normAutofit/>
-          </a:bodyPr>
+          <a:bodyPr wrap="square" lIns="0" tIns="0" rIns="0" bIns="0" rtlCol="0" anchor="ctr"/>
           <a:lstStyle/>
           <a:p>
             <a:pPr algn="ctr" indent="0" marL="0">
               <a:buNone/>
             </a:pPr>
             <a:r>
-              <a:rPr lang="en-US" sz="3600" b="1" dirty="0">
-                <a:solidFill>
-                  <a:srgbClr val="990011"/>
+              <a:rPr lang="en-US" sz="1600" i="1" dirty="0">
+                <a:solidFill>
+                  <a:srgbClr val="555555"/>
                 </a:solidFill>
                 <a:latin typeface="Times New Roman" pitchFamily="34" charset="0"/>
                 <a:ea typeface="Times New Roman" pitchFamily="34" charset="-122"/>
                 <a:cs typeface="Times New Roman" pitchFamily="34" charset="-120"/>
               </a:rPr>
-              <a:t>Expected Answer</a:t>
-            </a:r>
-            <a:endParaRPr lang="en-US" sz="3600" dirty="0"/>
-          </a:p>
-        </p:txBody>
-      </p:sp>
-      <p:sp>
-        <p:nvSpPr>
-          <p:cNvPr id="5" name="Text 2"/>
-          <p:cNvSpPr/>
-          <p:nvPr/>
-        </p:nvSpPr>
-        <p:spPr>
-          <a:xfrm>
-            <a:off x="5349240" y="1783080"/>
-            <a:ext cx="6522415" cy="4663440"/>
-          </a:xfrm>
-          <a:prstGeom prst="rect">
-            <a:avLst/>
-          </a:prstGeom>
-          <a:noFill/>
-          <a:ln/>
-        </p:spPr>
-        <p:txBody>
-          <a:bodyPr wrap="square" lIns="0" tIns="0" rIns="0" bIns="0" rtlCol="0" anchor="t"/>
-          <a:lstStyle/>
-          <a:p>
-            <a:pPr algn="l" indent="0" marL="0">
-              <a:spcAft>
-                <a:spcPts val="800"/>
-              </a:spcAft>
-              <a:buNone/>
-            </a:pPr>
-            <a:r>
-              <a:rPr lang="en-US" sz="4000" dirty="0">
-                <a:solidFill>
-                  <a:srgbClr val="111111"/>
-                </a:solidFill>
-                <a:latin typeface="Times New Roman" pitchFamily="34" charset="0"/>
-                <a:ea typeface="Times New Roman" pitchFamily="34" charset="-122"/>
-                <a:cs typeface="Times New Roman" pitchFamily="34" charset="-120"/>
-              </a:rPr>
-              <a:t>They keep water in their stems; they have long roots.</a:t>
-            </a:r>
-            <a:endParaRPr lang="en-US" sz="4000" dirty="0"/>
+              <a:t>Illustration: a salt crust</a:t>
+            </a:r>
+            <a:endParaRPr lang="en-US" sz="1600" dirty="0"/>
           </a:p>
         </p:txBody>
       </p:sp>
@@ -15197,7 +15561,7 @@
                 <a:ea typeface="Calibri" pitchFamily="34" charset="-122"/>
                 <a:cs typeface="Calibri" pitchFamily="34" charset="-120"/>
               </a:rPr>
-              <a:t>FORMATIVE EVALUATION</a:t>
+              <a:t>BOARD SUMMARY</a:t>
             </a:r>
             <a:endParaRPr lang="en-US" sz="1400" dirty="0"/>
           </a:p>
@@ -15262,7 +15626,7 @@
                 <a:ea typeface="Times New Roman" pitchFamily="34" charset="-122"/>
                 <a:cs typeface="Times New Roman" pitchFamily="34" charset="-120"/>
               </a:rPr>
-              <a:t>Evaluation 2</a:t>
+              <a:t>2. Soils</a:t>
             </a:r>
             <a:endParaRPr lang="en-US" sz="3600" dirty="0"/>
           </a:p>
@@ -15289,14 +15653,15 @@
           <a:bodyPr wrap="square" lIns="0" tIns="0" rIns="0" bIns="0" rtlCol="0" anchor="t"/>
           <a:lstStyle/>
           <a:p>
-            <a:pPr algn="l" indent="0" marL="0">
+            <a:pPr algn="l" marL="342900" indent="-342900">
               <a:spcAft>
                 <a:spcPts val="800"/>
               </a:spcAft>
-              <a:buNone/>
+              <a:buSzPct val="100000"/>
+              <a:buChar char="•"/>
             </a:pPr>
             <a:r>
-              <a:rPr lang="en-US" sz="4000" dirty="0">
+              <a:rPr lang="en-US" sz="4000" b="1" dirty="0">
                 <a:solidFill>
                   <a:srgbClr val="111111"/>
                 </a:solidFill>
@@ -15304,7 +15669,25 @@
                 <a:ea typeface="Times New Roman" pitchFamily="34" charset="-122"/>
                 <a:cs typeface="Times New Roman" pitchFamily="34" charset="-120"/>
               </a:rPr>
-              <a:t>Why do desert soils have little humus?</a:t>
+              <a:t>Fertile with water: </a:t>
+            </a:r>
+            <a:pPr algn="l" marL="342900" indent="-342900">
+              <a:spcAft>
+                <a:spcPts val="800"/>
+              </a:spcAft>
+              <a:buSzPct val="100000"/>
+              <a:buChar char="•"/>
+            </a:pPr>
+            <a:r>
+              <a:rPr lang="en-US" sz="4000" dirty="0">
+                <a:solidFill>
+                  <a:srgbClr val="111111"/>
+                </a:solidFill>
+                <a:latin typeface="Times New Roman" pitchFamily="34" charset="0"/>
+                <a:ea typeface="Times New Roman" pitchFamily="34" charset="-122"/>
+                <a:cs typeface="Times New Roman" pitchFamily="34" charset="-120"/>
+              </a:rPr>
+              <a:t>Irrigated soils can be productive.</a:t>
             </a:r>
             <a:endParaRPr lang="en-US" sz="4000" dirty="0"/>
           </a:p>
@@ -15481,7 +15864,7 @@
                 <a:ea typeface="Times New Roman" pitchFamily="34" charset="-122"/>
                 <a:cs typeface="Times New Roman" pitchFamily="34" charset="-120"/>
               </a:rPr>
-              <a:t>Expected Answer</a:t>
+              <a:t>Evaluation 1</a:t>
             </a:r>
             <a:endParaRPr lang="en-US" sz="3600" dirty="0"/>
           </a:p>
@@ -15523,7 +15906,7 @@
                 <a:ea typeface="Times New Roman" pitchFamily="34" charset="-122"/>
                 <a:cs typeface="Times New Roman" pitchFamily="34" charset="-120"/>
               </a:rPr>
-              <a:t>Because there are few plants.</a:t>
+              <a:t>Give two ways desert plants are adapted.</a:t>
             </a:r>
             <a:endParaRPr lang="en-US" sz="4000" dirty="0"/>
           </a:p>
@@ -15635,7 +16018,7 @@
                 <a:ea typeface="Calibri" pitchFamily="34" charset="-122"/>
                 <a:cs typeface="Calibri" pitchFamily="34" charset="-120"/>
               </a:rPr>
-              <a:t>REMEDIATION</a:t>
+              <a:t>FORMATIVE EVALUATION</a:t>
             </a:r>
             <a:endParaRPr lang="en-US" sz="1400" dirty="0"/>
           </a:p>
@@ -15658,7 +16041,7 @@
         <p:spPr>
           <a:xfrm>
             <a:off x="0" y="658368"/>
-            <a:ext cx="2468880" cy="5833872"/>
+            <a:ext cx="5120640" cy="5833872"/>
           </a:xfrm>
           <a:prstGeom prst="rect">
             <a:avLst/>
@@ -15673,8 +16056,8 @@
         </p:nvSpPr>
         <p:spPr>
           <a:xfrm>
-            <a:off x="2697480" y="1005840"/>
-            <a:ext cx="9174175" cy="731520"/>
+            <a:off x="5349240" y="1005840"/>
+            <a:ext cx="6522415" cy="731520"/>
           </a:xfrm>
           <a:prstGeom prst="rect">
             <a:avLst/>
@@ -15700,7 +16083,7 @@
                 <a:ea typeface="Times New Roman" pitchFamily="34" charset="-122"/>
                 <a:cs typeface="Times New Roman" pitchFamily="34" charset="-120"/>
               </a:rPr>
-              <a:t>Remediation</a:t>
+              <a:t>Expected Answer</a:t>
             </a:r>
             <a:endParaRPr lang="en-US" sz="3600" dirty="0"/>
           </a:p>
@@ -15714,8 +16097,8 @@
         </p:nvSpPr>
         <p:spPr>
           <a:xfrm>
-            <a:off x="2697480" y="1783080"/>
-            <a:ext cx="9174175" cy="4663440"/>
+            <a:off x="5349240" y="1783080"/>
+            <a:ext cx="6522415" cy="4663440"/>
           </a:xfrm>
           <a:prstGeom prst="rect">
             <a:avLst/>
@@ -15734,7 +16117,7 @@
               <a:buNone/>
             </a:pPr>
             <a:r>
-              <a:rPr lang="en-US" sz="4000" b="1" dirty="0">
+              <a:rPr lang="en-US" sz="4000" dirty="0">
                 <a:solidFill>
                   <a:srgbClr val="111111"/>
                 </a:solidFill>
@@ -15742,73 +16125,7 @@
                 <a:ea typeface="Times New Roman" pitchFamily="34" charset="-122"/>
                 <a:cs typeface="Times New Roman" pitchFamily="34" charset="-120"/>
               </a:rPr>
-              <a:t>Fill in the blanks:</a:t>
-            </a:r>
-            <a:endParaRPr lang="en-US" sz="4000" dirty="0"/>
-          </a:p>
-          <a:p>
-            <a:pPr algn="l" marL="342900" indent="-342900">
-              <a:spcAft>
-                <a:spcPts val="800"/>
-              </a:spcAft>
-              <a:buSzPct val="100000"/>
-              <a:buFont typeface="+mj-lt"/>
-              <a:buAutoNum type="arabicPeriod" startAt="1"/>
-            </a:pPr>
-            <a:r>
-              <a:rPr lang="en-US" sz="4000" dirty="0">
-                <a:solidFill>
-                  <a:srgbClr val="111111"/>
-                </a:solidFill>
-                <a:latin typeface="Times New Roman" pitchFamily="34" charset="0"/>
-                <a:ea typeface="Times New Roman" pitchFamily="34" charset="-122"/>
-                <a:cs typeface="Times New Roman" pitchFamily="34" charset="-120"/>
-              </a:rPr>
-              <a:t>A plant that lives with little water is a ______.</a:t>
-            </a:r>
-            <a:endParaRPr lang="en-US" sz="4000" dirty="0"/>
-          </a:p>
-          <a:p>
-            <a:pPr algn="l" marL="342900" indent="-342900">
-              <a:spcAft>
-                <a:spcPts val="800"/>
-              </a:spcAft>
-              <a:buSzPct val="100000"/>
-              <a:buFont typeface="+mj-lt"/>
-              <a:buAutoNum type="arabicPeriod" startAt="1"/>
-            </a:pPr>
-            <a:r>
-              <a:rPr lang="en-US" sz="4000" dirty="0">
-                <a:solidFill>
-                  <a:srgbClr val="111111"/>
-                </a:solidFill>
-                <a:latin typeface="Times New Roman" pitchFamily="34" charset="0"/>
-                <a:ea typeface="Times New Roman" pitchFamily="34" charset="-122"/>
-                <a:cs typeface="Times New Roman" pitchFamily="34" charset="-120"/>
-              </a:rPr>
-              <a:t>The cactus keeps water in its ______.</a:t>
-            </a:r>
-            <a:endParaRPr lang="en-US" sz="4000" dirty="0"/>
-          </a:p>
-          <a:p>
-            <a:pPr algn="l" marL="342900" indent="-342900">
-              <a:spcAft>
-                <a:spcPts val="800"/>
-              </a:spcAft>
-              <a:buSzPct val="100000"/>
-              <a:buFont typeface="+mj-lt"/>
-              <a:buAutoNum type="arabicPeriod" startAt="1"/>
-            </a:pPr>
-            <a:r>
-              <a:rPr lang="en-US" sz="4000" dirty="0">
-                <a:solidFill>
-                  <a:srgbClr val="111111"/>
-                </a:solidFill>
-                <a:latin typeface="Times New Roman" pitchFamily="34" charset="0"/>
-                <a:ea typeface="Times New Roman" pitchFamily="34" charset="-122"/>
-                <a:cs typeface="Times New Roman" pitchFamily="34" charset="-120"/>
-              </a:rPr>
-              <a:t>Desert soils are often ______ because the sun leaves salt.</a:t>
+              <a:t>They keep water in their stems; they have long roots.</a:t>
             </a:r>
             <a:endParaRPr lang="en-US" sz="4000" dirty="0"/>
           </a:p>
@@ -15920,7 +16237,7 @@
                 <a:ea typeface="Calibri" pitchFamily="34" charset="-122"/>
                 <a:cs typeface="Calibri" pitchFamily="34" charset="-120"/>
               </a:rPr>
-              <a:t>HOMEWORK</a:t>
+              <a:t>FORMATIVE EVALUATION</a:t>
             </a:r>
             <a:endParaRPr lang="en-US" sz="1400" dirty="0"/>
           </a:p>
@@ -15985,7 +16302,7 @@
                 <a:ea typeface="Times New Roman" pitchFamily="34" charset="-122"/>
                 <a:cs typeface="Times New Roman" pitchFamily="34" charset="-120"/>
               </a:rPr>
-              <a:t>Homework</a:t>
+              <a:t>Evaluation 2</a:t>
             </a:r>
             <a:endParaRPr lang="en-US" sz="3600" dirty="0"/>
           </a:p>
@@ -16027,7 +16344,7 @@
                 <a:ea typeface="Times New Roman" pitchFamily="34" charset="-122"/>
                 <a:cs typeface="Times New Roman" pitchFamily="34" charset="-120"/>
               </a:rPr>
-              <a:t>Imagine you must spend one week in the Sahara. Write down three problems you would face and one way to solve each.</a:t>
+              <a:t>Why do desert soils have little humus?</a:t>
             </a:r>
             <a:endParaRPr lang="en-US" sz="4000" dirty="0"/>
           </a:p>
@@ -16139,7 +16456,7 @@
                 <a:ea typeface="Calibri" pitchFamily="34" charset="-122"/>
                 <a:cs typeface="Calibri" pitchFamily="34" charset="-120"/>
               </a:rPr>
-              <a:t>NEXT LESSON</a:t>
+              <a:t>FORMATIVE EVALUATION</a:t>
             </a:r>
             <a:endParaRPr lang="en-US" sz="1400" dirty="0"/>
           </a:p>
@@ -16204,7 +16521,7 @@
                 <a:ea typeface="Times New Roman" pitchFamily="34" charset="-122"/>
                 <a:cs typeface="Times New Roman" pitchFamily="34" charset="-120"/>
               </a:rPr>
-              <a:t>Next Lesson</a:t>
+              <a:t>Expected Answer</a:t>
             </a:r>
             <a:endParaRPr lang="en-US" sz="3600" dirty="0"/>
           </a:p>
@@ -16228,17 +16545,17 @@
           <a:ln/>
         </p:spPr>
         <p:txBody>
-          <a:bodyPr wrap="square" lIns="0" tIns="0" rIns="0" bIns="0" rtlCol="0" anchor="ctr"/>
-          <a:lstStyle/>
-          <a:p>
-            <a:pPr algn="ctr" indent="0" marL="0">
+          <a:bodyPr wrap="square" lIns="0" tIns="0" rIns="0" bIns="0" rtlCol="0" anchor="t"/>
+          <a:lstStyle/>
+          <a:p>
+            <a:pPr algn="l" indent="0" marL="0">
               <a:spcAft>
                 <a:spcPts val="800"/>
               </a:spcAft>
               <a:buNone/>
             </a:pPr>
             <a:r>
-              <a:rPr lang="en-US" sz="4000" b="1" dirty="0">
+              <a:rPr lang="en-US" sz="4000" dirty="0">
                 <a:solidFill>
                   <a:srgbClr val="111111"/>
                 </a:solidFill>
@@ -16246,27 +16563,7 @@
                 <a:ea typeface="Times New Roman" pitchFamily="34" charset="-122"/>
                 <a:cs typeface="Times New Roman" pitchFamily="34" charset="-120"/>
               </a:rPr>
-              <a:t>Our next lesson will be on:</a:t>
-            </a:r>
-            <a:endParaRPr lang="en-US" sz="4000" dirty="0"/>
-          </a:p>
-          <a:p>
-            <a:pPr algn="ctr" indent="0" marL="0">
-              <a:spcAft>
-                <a:spcPts val="800"/>
-              </a:spcAft>
-              <a:buNone/>
-            </a:pPr>
-            <a:r>
-              <a:rPr lang="en-US" sz="4000" b="1" dirty="0">
-                <a:solidFill>
-                  <a:srgbClr val="990011"/>
-                </a:solidFill>
-                <a:latin typeface="Times New Roman" pitchFamily="34" charset="0"/>
-                <a:ea typeface="Times New Roman" pitchFamily="34" charset="-122"/>
-                <a:cs typeface="Times New Roman" pitchFamily="34" charset="-120"/>
-              </a:rPr>
-              <a:t>Lesson 3 (Part 4): The Desert Regions: Problems Faced and Adaptations</a:t>
+              <a:t>Because there are few plants.</a:t>
             </a:r>
             <a:endParaRPr lang="en-US" sz="4000" dirty="0"/>
           </a:p>
@@ -16378,6 +16675,749 @@
                 <a:ea typeface="Calibri" pitchFamily="34" charset="-122"/>
                 <a:cs typeface="Calibri" pitchFamily="34" charset="-120"/>
               </a:rPr>
+              <a:t>REMEDIATION</a:t>
+            </a:r>
+            <a:endParaRPr lang="en-US" sz="1400" dirty="0"/>
+          </a:p>
+        </p:txBody>
+      </p:sp>
+      <p:pic>
+        <p:nvPicPr>
+          <p:cNvPr id="3" name="Image 0" descr="/home/claude/f4/img/minesec_sheet.png">    </p:cNvPr>
+          <p:cNvPicPr>
+            <a:picLocks noChangeAspect="1"/>
+          </p:cNvPicPr>
+          <p:nvPr/>
+        </p:nvPicPr>
+        <p:blipFill>
+          <a:blip r:embed="rId1"/>
+          <a:stretch>
+            <a:fillRect/>
+          </a:stretch>
+        </p:blipFill>
+        <p:spPr>
+          <a:xfrm>
+            <a:off x="0" y="658368"/>
+            <a:ext cx="2468880" cy="5833872"/>
+          </a:xfrm>
+          <a:prstGeom prst="rect">
+            <a:avLst/>
+          </a:prstGeom>
+        </p:spPr>
+      </p:pic>
+      <p:sp>
+        <p:nvSpPr>
+          <p:cNvPr id="4" name="Text 1"/>
+          <p:cNvSpPr/>
+          <p:nvPr/>
+        </p:nvSpPr>
+        <p:spPr>
+          <a:xfrm>
+            <a:off x="2697480" y="1005840"/>
+            <a:ext cx="9174175" cy="731520"/>
+          </a:xfrm>
+          <a:prstGeom prst="rect">
+            <a:avLst/>
+          </a:prstGeom>
+          <a:noFill/>
+          <a:ln/>
+        </p:spPr>
+        <p:txBody>
+          <a:bodyPr wrap="square" lIns="0" tIns="0" rIns="0" bIns="0" rtlCol="0" anchor="ctr">
+            <a:normAutofit/>
+          </a:bodyPr>
+          <a:lstStyle/>
+          <a:p>
+            <a:pPr algn="ctr" indent="0" marL="0">
+              <a:buNone/>
+            </a:pPr>
+            <a:r>
+              <a:rPr lang="en-US" sz="3600" b="1" dirty="0">
+                <a:solidFill>
+                  <a:srgbClr val="990011"/>
+                </a:solidFill>
+                <a:latin typeface="Times New Roman" pitchFamily="34" charset="0"/>
+                <a:ea typeface="Times New Roman" pitchFamily="34" charset="-122"/>
+                <a:cs typeface="Times New Roman" pitchFamily="34" charset="-120"/>
+              </a:rPr>
+              <a:t>Remediation</a:t>
+            </a:r>
+            <a:endParaRPr lang="en-US" sz="3600" dirty="0"/>
+          </a:p>
+        </p:txBody>
+      </p:sp>
+      <p:sp>
+        <p:nvSpPr>
+          <p:cNvPr id="5" name="Text 2"/>
+          <p:cNvSpPr/>
+          <p:nvPr/>
+        </p:nvSpPr>
+        <p:spPr>
+          <a:xfrm>
+            <a:off x="2697480" y="1783080"/>
+            <a:ext cx="9174175" cy="4663440"/>
+          </a:xfrm>
+          <a:prstGeom prst="rect">
+            <a:avLst/>
+          </a:prstGeom>
+          <a:noFill/>
+          <a:ln/>
+        </p:spPr>
+        <p:txBody>
+          <a:bodyPr wrap="square" lIns="0" tIns="0" rIns="0" bIns="0" rtlCol="0" anchor="t"/>
+          <a:lstStyle/>
+          <a:p>
+            <a:pPr algn="l" indent="0" marL="0">
+              <a:spcAft>
+                <a:spcPts val="800"/>
+              </a:spcAft>
+              <a:buNone/>
+            </a:pPr>
+            <a:r>
+              <a:rPr lang="en-US" sz="4000" b="1" dirty="0">
+                <a:solidFill>
+                  <a:srgbClr val="111111"/>
+                </a:solidFill>
+                <a:latin typeface="Times New Roman" pitchFamily="34" charset="0"/>
+                <a:ea typeface="Times New Roman" pitchFamily="34" charset="-122"/>
+                <a:cs typeface="Times New Roman" pitchFamily="34" charset="-120"/>
+              </a:rPr>
+              <a:t>Fill in the blanks:</a:t>
+            </a:r>
+            <a:endParaRPr lang="en-US" sz="4000" dirty="0"/>
+          </a:p>
+          <a:p>
+            <a:pPr algn="l" marL="342900" indent="-342900">
+              <a:spcAft>
+                <a:spcPts val="800"/>
+              </a:spcAft>
+              <a:buSzPct val="100000"/>
+              <a:buFont typeface="+mj-lt"/>
+              <a:buAutoNum type="arabicPeriod" startAt="1"/>
+            </a:pPr>
+            <a:r>
+              <a:rPr lang="en-US" sz="4000" dirty="0">
+                <a:solidFill>
+                  <a:srgbClr val="111111"/>
+                </a:solidFill>
+                <a:latin typeface="Times New Roman" pitchFamily="34" charset="0"/>
+                <a:ea typeface="Times New Roman" pitchFamily="34" charset="-122"/>
+                <a:cs typeface="Times New Roman" pitchFamily="34" charset="-120"/>
+              </a:rPr>
+              <a:t>A plant that lives with little water is a ______.</a:t>
+            </a:r>
+            <a:endParaRPr lang="en-US" sz="4000" dirty="0"/>
+          </a:p>
+          <a:p>
+            <a:pPr algn="l" marL="342900" indent="-342900">
+              <a:spcAft>
+                <a:spcPts val="800"/>
+              </a:spcAft>
+              <a:buSzPct val="100000"/>
+              <a:buFont typeface="+mj-lt"/>
+              <a:buAutoNum type="arabicPeriod" startAt="1"/>
+            </a:pPr>
+            <a:r>
+              <a:rPr lang="en-US" sz="4000" dirty="0">
+                <a:solidFill>
+                  <a:srgbClr val="111111"/>
+                </a:solidFill>
+                <a:latin typeface="Times New Roman" pitchFamily="34" charset="0"/>
+                <a:ea typeface="Times New Roman" pitchFamily="34" charset="-122"/>
+                <a:cs typeface="Times New Roman" pitchFamily="34" charset="-120"/>
+              </a:rPr>
+              <a:t>The cactus keeps water in its ______.</a:t>
+            </a:r>
+            <a:endParaRPr lang="en-US" sz="4000" dirty="0"/>
+          </a:p>
+          <a:p>
+            <a:pPr algn="l" marL="342900" indent="-342900">
+              <a:spcAft>
+                <a:spcPts val="800"/>
+              </a:spcAft>
+              <a:buSzPct val="100000"/>
+              <a:buFont typeface="+mj-lt"/>
+              <a:buAutoNum type="arabicPeriod" startAt="1"/>
+            </a:pPr>
+            <a:r>
+              <a:rPr lang="en-US" sz="4000" dirty="0">
+                <a:solidFill>
+                  <a:srgbClr val="111111"/>
+                </a:solidFill>
+                <a:latin typeface="Times New Roman" pitchFamily="34" charset="0"/>
+                <a:ea typeface="Times New Roman" pitchFamily="34" charset="-122"/>
+                <a:cs typeface="Times New Roman" pitchFamily="34" charset="-120"/>
+              </a:rPr>
+              <a:t>Desert soils are often ______ because the sun leaves salt.</a:t>
+            </a:r>
+            <a:endParaRPr lang="en-US" sz="4000" dirty="0"/>
+          </a:p>
+        </p:txBody>
+      </p:sp>
+      <p:sp>
+        <p:nvSpPr>
+          <p:cNvPr id="25" name="Slide Number Placeholder 0"/>
+          <p:cNvSpPr>
+            <a:spLocks noGrp="1"/>
+          </p:cNvSpPr>
+          <p:nvPr>
+            <p:ph type="sldNum" sz="quarter" idx="4294967295"/>
+          </p:nvPr>
+        </p:nvSpPr>
+        <p:spPr>
+          <a:xfrm>
+            <a:off x="27432" y="91440"/>
+            <a:ext cx="585216" cy="475488"/>
+          </a:xfrm>
+          <a:prstGeom prst="rect">
+            <a:avLst/>
+          </a:prstGeom>
+          <a:extLst>
+            <a:ext uri="{C572A759-6A51-4108-AA02-DFA0A04FC94B}">
+              <ma14:wrappingTextBoxFlag xmlns:ma14="http://schemas.microsoft.com/office/mac/drawingml/2011/main" val="0"/>
+            </a:ext>
+          </a:extLst>
+        </p:spPr>
+        <p:txBody>
+          <a:bodyPr/>
+          <a:lstStyle>
+            <a:lvl1pPr>
+              <a:defRPr sz="2000">
+                <a:solidFill>
+                  <a:srgbClr val="FFFFFF"/>
+                </a:solidFill>
+                <a:latin typeface="Calibri"/>
+                <a:ea typeface="Calibri"/>
+                <a:cs typeface="Calibri"/>
+              </a:defRPr>
+            </a:lvl1pPr>
+          </a:lstStyle>
+          <a:p>
+            <a:pPr algn="ctr"/>
+            <a:fld id="{F7021451-1387-4CA6-816F-3879F97B5CBC}" type="slidenum">
+              <a:rPr b="1" lang="en-US"/>
+              <a:t>46</a:t>
+            </a:fld>
+            <a:endParaRPr lang="en-US"/>
+          </a:p>
+        </p:txBody>
+      </p:sp>
+    </p:spTree>
+  </p:cSld>
+  <p:clrMapOvr>
+    <a:masterClrMapping/>
+  </p:clrMapOvr>
+</p:sld>
+</file>
+
+<file path=ppt/slides/slide47.xml><?xml version="1.0" encoding="utf-8"?>
+<p:sld xmlns:a="http://schemas.openxmlformats.org/drawingml/2006/main" xmlns:r="http://schemas.openxmlformats.org/officeDocument/2006/relationships" xmlns:p="http://schemas.openxmlformats.org/presentationml/2006/main">
+  <p:cSld name="Slide 47">
+    <p:spTree>
+      <p:nvGrpSpPr>
+        <p:cNvPr id="1" name=""/>
+        <p:cNvGrpSpPr/>
+        <p:nvPr/>
+      </p:nvGrpSpPr>
+      <p:grpSpPr>
+        <a:xfrm>
+          <a:off x="0" y="0"/>
+          <a:ext cx="0" cy="0"/>
+          <a:chOff x="0" y="0"/>
+          <a:chExt cx="0" cy="0"/>
+        </a:xfrm>
+      </p:grpSpPr>
+      <p:sp>
+        <p:nvSpPr>
+          <p:cNvPr id="2" name="Text 0"/>
+          <p:cNvSpPr/>
+          <p:nvPr/>
+        </p:nvSpPr>
+        <p:spPr>
+          <a:xfrm>
+            <a:off x="457200" y="713232"/>
+            <a:ext cx="11368735" cy="274320"/>
+          </a:xfrm>
+          <a:prstGeom prst="rect">
+            <a:avLst/>
+          </a:prstGeom>
+          <a:noFill/>
+          <a:ln/>
+        </p:spPr>
+        <p:txBody>
+          <a:bodyPr wrap="square" lIns="0" tIns="0" rIns="0" bIns="0" rtlCol="0" anchor="ctr"/>
+          <a:lstStyle/>
+          <a:p>
+            <a:pPr algn="r" indent="0" marL="0">
+              <a:buNone/>
+            </a:pPr>
+            <a:r>
+              <a:rPr lang="en-US" sz="1400" b="1" dirty="0">
+                <a:solidFill>
+                  <a:srgbClr val="1C3F6E"/>
+                </a:solidFill>
+                <a:latin typeface="Calibri" pitchFamily="34" charset="0"/>
+                <a:ea typeface="Calibri" pitchFamily="34" charset="-122"/>
+                <a:cs typeface="Calibri" pitchFamily="34" charset="-120"/>
+              </a:rPr>
+              <a:t>HOMEWORK</a:t>
+            </a:r>
+            <a:endParaRPr lang="en-US" sz="1400" dirty="0"/>
+          </a:p>
+        </p:txBody>
+      </p:sp>
+      <p:pic>
+        <p:nvPicPr>
+          <p:cNvPr id="3" name="Image 0" descr="/home/claude/f4/img/minesec_sheet.png">    </p:cNvPr>
+          <p:cNvPicPr>
+            <a:picLocks noChangeAspect="1"/>
+          </p:cNvPicPr>
+          <p:nvPr/>
+        </p:nvPicPr>
+        <p:blipFill>
+          <a:blip r:embed="rId1"/>
+          <a:stretch>
+            <a:fillRect/>
+          </a:stretch>
+        </p:blipFill>
+        <p:spPr>
+          <a:xfrm>
+            <a:off x="0" y="658368"/>
+            <a:ext cx="5120640" cy="5833872"/>
+          </a:xfrm>
+          <a:prstGeom prst="rect">
+            <a:avLst/>
+          </a:prstGeom>
+        </p:spPr>
+      </p:pic>
+      <p:sp>
+        <p:nvSpPr>
+          <p:cNvPr id="4" name="Text 1"/>
+          <p:cNvSpPr/>
+          <p:nvPr/>
+        </p:nvSpPr>
+        <p:spPr>
+          <a:xfrm>
+            <a:off x="5349240" y="1005840"/>
+            <a:ext cx="6522415" cy="731520"/>
+          </a:xfrm>
+          <a:prstGeom prst="rect">
+            <a:avLst/>
+          </a:prstGeom>
+          <a:noFill/>
+          <a:ln/>
+        </p:spPr>
+        <p:txBody>
+          <a:bodyPr wrap="square" lIns="0" tIns="0" rIns="0" bIns="0" rtlCol="0" anchor="ctr">
+            <a:normAutofit/>
+          </a:bodyPr>
+          <a:lstStyle/>
+          <a:p>
+            <a:pPr algn="ctr" indent="0" marL="0">
+              <a:buNone/>
+            </a:pPr>
+            <a:r>
+              <a:rPr lang="en-US" sz="3600" b="1" dirty="0">
+                <a:solidFill>
+                  <a:srgbClr val="990011"/>
+                </a:solidFill>
+                <a:latin typeface="Times New Roman" pitchFamily="34" charset="0"/>
+                <a:ea typeface="Times New Roman" pitchFamily="34" charset="-122"/>
+                <a:cs typeface="Times New Roman" pitchFamily="34" charset="-120"/>
+              </a:rPr>
+              <a:t>Homework</a:t>
+            </a:r>
+            <a:endParaRPr lang="en-US" sz="3600" dirty="0"/>
+          </a:p>
+        </p:txBody>
+      </p:sp>
+      <p:sp>
+        <p:nvSpPr>
+          <p:cNvPr id="5" name="Text 2"/>
+          <p:cNvSpPr/>
+          <p:nvPr/>
+        </p:nvSpPr>
+        <p:spPr>
+          <a:xfrm>
+            <a:off x="5349240" y="1783080"/>
+            <a:ext cx="6522415" cy="4663440"/>
+          </a:xfrm>
+          <a:prstGeom prst="rect">
+            <a:avLst/>
+          </a:prstGeom>
+          <a:noFill/>
+          <a:ln/>
+        </p:spPr>
+        <p:txBody>
+          <a:bodyPr wrap="square" lIns="0" tIns="0" rIns="0" bIns="0" rtlCol="0" anchor="t"/>
+          <a:lstStyle/>
+          <a:p>
+            <a:pPr algn="l" indent="0" marL="0">
+              <a:spcAft>
+                <a:spcPts val="800"/>
+              </a:spcAft>
+              <a:buNone/>
+            </a:pPr>
+            <a:r>
+              <a:rPr lang="en-US" sz="4000" dirty="0">
+                <a:solidFill>
+                  <a:srgbClr val="111111"/>
+                </a:solidFill>
+                <a:latin typeface="Times New Roman" pitchFamily="34" charset="0"/>
+                <a:ea typeface="Times New Roman" pitchFamily="34" charset="-122"/>
+                <a:cs typeface="Times New Roman" pitchFamily="34" charset="-120"/>
+              </a:rPr>
+              <a:t>Imagine you must spend one week in the Sahara. Write down three problems you would face and one way to solve each.</a:t>
+            </a:r>
+            <a:endParaRPr lang="en-US" sz="4000" dirty="0"/>
+          </a:p>
+        </p:txBody>
+      </p:sp>
+      <p:sp>
+        <p:nvSpPr>
+          <p:cNvPr id="25" name="Slide Number Placeholder 0"/>
+          <p:cNvSpPr>
+            <a:spLocks noGrp="1"/>
+          </p:cNvSpPr>
+          <p:nvPr>
+            <p:ph type="sldNum" sz="quarter" idx="4294967295"/>
+          </p:nvPr>
+        </p:nvSpPr>
+        <p:spPr>
+          <a:xfrm>
+            <a:off x="27432" y="91440"/>
+            <a:ext cx="585216" cy="475488"/>
+          </a:xfrm>
+          <a:prstGeom prst="rect">
+            <a:avLst/>
+          </a:prstGeom>
+          <a:extLst>
+            <a:ext uri="{C572A759-6A51-4108-AA02-DFA0A04FC94B}">
+              <ma14:wrappingTextBoxFlag xmlns:ma14="http://schemas.microsoft.com/office/mac/drawingml/2011/main" val="0"/>
+            </a:ext>
+          </a:extLst>
+        </p:spPr>
+        <p:txBody>
+          <a:bodyPr/>
+          <a:lstStyle>
+            <a:lvl1pPr>
+              <a:defRPr sz="2000">
+                <a:solidFill>
+                  <a:srgbClr val="FFFFFF"/>
+                </a:solidFill>
+                <a:latin typeface="Calibri"/>
+                <a:ea typeface="Calibri"/>
+                <a:cs typeface="Calibri"/>
+              </a:defRPr>
+            </a:lvl1pPr>
+          </a:lstStyle>
+          <a:p>
+            <a:pPr algn="ctr"/>
+            <a:fld id="{F7021451-1387-4CA6-816F-3879F97B5CBC}" type="slidenum">
+              <a:rPr b="1" lang="en-US"/>
+              <a:t>47</a:t>
+            </a:fld>
+            <a:endParaRPr lang="en-US"/>
+          </a:p>
+        </p:txBody>
+      </p:sp>
+    </p:spTree>
+  </p:cSld>
+  <p:clrMapOvr>
+    <a:masterClrMapping/>
+  </p:clrMapOvr>
+</p:sld>
+</file>
+
+<file path=ppt/slides/slide48.xml><?xml version="1.0" encoding="utf-8"?>
+<p:sld xmlns:a="http://schemas.openxmlformats.org/drawingml/2006/main" xmlns:r="http://schemas.openxmlformats.org/officeDocument/2006/relationships" xmlns:p="http://schemas.openxmlformats.org/presentationml/2006/main">
+  <p:cSld name="Slide 48">
+    <p:spTree>
+      <p:nvGrpSpPr>
+        <p:cNvPr id="1" name=""/>
+        <p:cNvGrpSpPr/>
+        <p:nvPr/>
+      </p:nvGrpSpPr>
+      <p:grpSpPr>
+        <a:xfrm>
+          <a:off x="0" y="0"/>
+          <a:ext cx="0" cy="0"/>
+          <a:chOff x="0" y="0"/>
+          <a:chExt cx="0" cy="0"/>
+        </a:xfrm>
+      </p:grpSpPr>
+      <p:sp>
+        <p:nvSpPr>
+          <p:cNvPr id="2" name="Text 0"/>
+          <p:cNvSpPr/>
+          <p:nvPr/>
+        </p:nvSpPr>
+        <p:spPr>
+          <a:xfrm>
+            <a:off x="457200" y="713232"/>
+            <a:ext cx="11368735" cy="274320"/>
+          </a:xfrm>
+          <a:prstGeom prst="rect">
+            <a:avLst/>
+          </a:prstGeom>
+          <a:noFill/>
+          <a:ln/>
+        </p:spPr>
+        <p:txBody>
+          <a:bodyPr wrap="square" lIns="0" tIns="0" rIns="0" bIns="0" rtlCol="0" anchor="ctr"/>
+          <a:lstStyle/>
+          <a:p>
+            <a:pPr algn="r" indent="0" marL="0">
+              <a:buNone/>
+            </a:pPr>
+            <a:r>
+              <a:rPr lang="en-US" sz="1400" b="1" dirty="0">
+                <a:solidFill>
+                  <a:srgbClr val="1C3F6E"/>
+                </a:solidFill>
+                <a:latin typeface="Calibri" pitchFamily="34" charset="0"/>
+                <a:ea typeface="Calibri" pitchFamily="34" charset="-122"/>
+                <a:cs typeface="Calibri" pitchFamily="34" charset="-120"/>
+              </a:rPr>
+              <a:t>NEXT LESSON</a:t>
+            </a:r>
+            <a:endParaRPr lang="en-US" sz="1400" dirty="0"/>
+          </a:p>
+        </p:txBody>
+      </p:sp>
+      <p:pic>
+        <p:nvPicPr>
+          <p:cNvPr id="3" name="Image 0" descr="/home/claude/f4/img/minesec_sheet.png">    </p:cNvPr>
+          <p:cNvPicPr>
+            <a:picLocks noChangeAspect="1"/>
+          </p:cNvPicPr>
+          <p:nvPr/>
+        </p:nvPicPr>
+        <p:blipFill>
+          <a:blip r:embed="rId1"/>
+          <a:stretch>
+            <a:fillRect/>
+          </a:stretch>
+        </p:blipFill>
+        <p:spPr>
+          <a:xfrm>
+            <a:off x="0" y="658368"/>
+            <a:ext cx="5120640" cy="5833872"/>
+          </a:xfrm>
+          <a:prstGeom prst="rect">
+            <a:avLst/>
+          </a:prstGeom>
+        </p:spPr>
+      </p:pic>
+      <p:sp>
+        <p:nvSpPr>
+          <p:cNvPr id="4" name="Text 1"/>
+          <p:cNvSpPr/>
+          <p:nvPr/>
+        </p:nvSpPr>
+        <p:spPr>
+          <a:xfrm>
+            <a:off x="5349240" y="1005840"/>
+            <a:ext cx="6522415" cy="731520"/>
+          </a:xfrm>
+          <a:prstGeom prst="rect">
+            <a:avLst/>
+          </a:prstGeom>
+          <a:noFill/>
+          <a:ln/>
+        </p:spPr>
+        <p:txBody>
+          <a:bodyPr wrap="square" lIns="0" tIns="0" rIns="0" bIns="0" rtlCol="0" anchor="ctr">
+            <a:normAutofit/>
+          </a:bodyPr>
+          <a:lstStyle/>
+          <a:p>
+            <a:pPr algn="ctr" indent="0" marL="0">
+              <a:buNone/>
+            </a:pPr>
+            <a:r>
+              <a:rPr lang="en-US" sz="3600" b="1" dirty="0">
+                <a:solidFill>
+                  <a:srgbClr val="990011"/>
+                </a:solidFill>
+                <a:latin typeface="Times New Roman" pitchFamily="34" charset="0"/>
+                <a:ea typeface="Times New Roman" pitchFamily="34" charset="-122"/>
+                <a:cs typeface="Times New Roman" pitchFamily="34" charset="-120"/>
+              </a:rPr>
+              <a:t>Next Lesson</a:t>
+            </a:r>
+            <a:endParaRPr lang="en-US" sz="3600" dirty="0"/>
+          </a:p>
+        </p:txBody>
+      </p:sp>
+      <p:sp>
+        <p:nvSpPr>
+          <p:cNvPr id="5" name="Text 2"/>
+          <p:cNvSpPr/>
+          <p:nvPr/>
+        </p:nvSpPr>
+        <p:spPr>
+          <a:xfrm>
+            <a:off x="5349240" y="1783080"/>
+            <a:ext cx="6522415" cy="4663440"/>
+          </a:xfrm>
+          <a:prstGeom prst="rect">
+            <a:avLst/>
+          </a:prstGeom>
+          <a:noFill/>
+          <a:ln/>
+        </p:spPr>
+        <p:txBody>
+          <a:bodyPr wrap="square" lIns="0" tIns="0" rIns="0" bIns="0" rtlCol="0" anchor="ctr"/>
+          <a:lstStyle/>
+          <a:p>
+            <a:pPr algn="ctr" indent="0" marL="0">
+              <a:spcAft>
+                <a:spcPts val="800"/>
+              </a:spcAft>
+              <a:buNone/>
+            </a:pPr>
+            <a:r>
+              <a:rPr lang="en-US" sz="4000" b="1" dirty="0">
+                <a:solidFill>
+                  <a:srgbClr val="111111"/>
+                </a:solidFill>
+                <a:latin typeface="Times New Roman" pitchFamily="34" charset="0"/>
+                <a:ea typeface="Times New Roman" pitchFamily="34" charset="-122"/>
+                <a:cs typeface="Times New Roman" pitchFamily="34" charset="-120"/>
+              </a:rPr>
+              <a:t>Our next lesson will be on:</a:t>
+            </a:r>
+            <a:endParaRPr lang="en-US" sz="4000" dirty="0"/>
+          </a:p>
+          <a:p>
+            <a:pPr algn="ctr" indent="0" marL="0">
+              <a:spcAft>
+                <a:spcPts val="800"/>
+              </a:spcAft>
+              <a:buNone/>
+            </a:pPr>
+            <a:r>
+              <a:rPr lang="en-US" sz="4000" b="1" dirty="0">
+                <a:solidFill>
+                  <a:srgbClr val="990011"/>
+                </a:solidFill>
+                <a:latin typeface="Times New Roman" pitchFamily="34" charset="0"/>
+                <a:ea typeface="Times New Roman" pitchFamily="34" charset="-122"/>
+                <a:cs typeface="Times New Roman" pitchFamily="34" charset="-120"/>
+              </a:rPr>
+              <a:t>Lesson 3 (Part 4): The Desert Regions: Problems Faced and Adaptations</a:t>
+            </a:r>
+            <a:endParaRPr lang="en-US" sz="4000" dirty="0"/>
+          </a:p>
+        </p:txBody>
+      </p:sp>
+      <p:sp>
+        <p:nvSpPr>
+          <p:cNvPr id="25" name="Slide Number Placeholder 0"/>
+          <p:cNvSpPr>
+            <a:spLocks noGrp="1"/>
+          </p:cNvSpPr>
+          <p:nvPr>
+            <p:ph type="sldNum" sz="quarter" idx="4294967295"/>
+          </p:nvPr>
+        </p:nvSpPr>
+        <p:spPr>
+          <a:xfrm>
+            <a:off x="27432" y="91440"/>
+            <a:ext cx="585216" cy="475488"/>
+          </a:xfrm>
+          <a:prstGeom prst="rect">
+            <a:avLst/>
+          </a:prstGeom>
+          <a:extLst>
+            <a:ext uri="{C572A759-6A51-4108-AA02-DFA0A04FC94B}">
+              <ma14:wrappingTextBoxFlag xmlns:ma14="http://schemas.microsoft.com/office/mac/drawingml/2011/main" val="0"/>
+            </a:ext>
+          </a:extLst>
+        </p:spPr>
+        <p:txBody>
+          <a:bodyPr/>
+          <a:lstStyle>
+            <a:lvl1pPr>
+              <a:defRPr sz="2000">
+                <a:solidFill>
+                  <a:srgbClr val="FFFFFF"/>
+                </a:solidFill>
+                <a:latin typeface="Calibri"/>
+                <a:ea typeface="Calibri"/>
+                <a:cs typeface="Calibri"/>
+              </a:defRPr>
+            </a:lvl1pPr>
+          </a:lstStyle>
+          <a:p>
+            <a:pPr algn="ctr"/>
+            <a:fld id="{F7021451-1387-4CA6-816F-3879F97B5CBC}" type="slidenum">
+              <a:rPr b="1" lang="en-US"/>
+              <a:t>48</a:t>
+            </a:fld>
+            <a:endParaRPr lang="en-US"/>
+          </a:p>
+        </p:txBody>
+      </p:sp>
+    </p:spTree>
+  </p:cSld>
+  <p:clrMapOvr>
+    <a:masterClrMapping/>
+  </p:clrMapOvr>
+</p:sld>
+</file>
+
+<file path=ppt/slides/slide49.xml><?xml version="1.0" encoding="utf-8"?>
+<p:sld xmlns:a="http://schemas.openxmlformats.org/drawingml/2006/main" xmlns:r="http://schemas.openxmlformats.org/officeDocument/2006/relationships" xmlns:p="http://schemas.openxmlformats.org/presentationml/2006/main">
+  <p:cSld name="Slide 49">
+    <p:spTree>
+      <p:nvGrpSpPr>
+        <p:cNvPr id="1" name=""/>
+        <p:cNvGrpSpPr/>
+        <p:nvPr/>
+      </p:nvGrpSpPr>
+      <p:grpSpPr>
+        <a:xfrm>
+          <a:off x="0" y="0"/>
+          <a:ext cx="0" cy="0"/>
+          <a:chOff x="0" y="0"/>
+          <a:chExt cx="0" cy="0"/>
+        </a:xfrm>
+      </p:grpSpPr>
+      <p:sp>
+        <p:nvSpPr>
+          <p:cNvPr id="2" name="Text 0"/>
+          <p:cNvSpPr/>
+          <p:nvPr/>
+        </p:nvSpPr>
+        <p:spPr>
+          <a:xfrm>
+            <a:off x="457200" y="713232"/>
+            <a:ext cx="11368735" cy="274320"/>
+          </a:xfrm>
+          <a:prstGeom prst="rect">
+            <a:avLst/>
+          </a:prstGeom>
+          <a:noFill/>
+          <a:ln/>
+        </p:spPr>
+        <p:txBody>
+          <a:bodyPr wrap="square" lIns="0" tIns="0" rIns="0" bIns="0" rtlCol="0" anchor="ctr"/>
+          <a:lstStyle/>
+          <a:p>
+            <a:pPr algn="r" indent="0" marL="0">
+              <a:buNone/>
+            </a:pPr>
+            <a:r>
+              <a:rPr lang="en-US" sz="1400" b="1" dirty="0">
+                <a:solidFill>
+                  <a:srgbClr val="1C3F6E"/>
+                </a:solidFill>
+                <a:latin typeface="Calibri" pitchFamily="34" charset="0"/>
+                <a:ea typeface="Calibri" pitchFamily="34" charset="-122"/>
+                <a:cs typeface="Calibri" pitchFamily="34" charset="-120"/>
+              </a:rPr>
               <a:t>BILINGUAL GAME</a:t>
             </a:r>
             <a:endParaRPr lang="en-US" sz="1400" dirty="0"/>
@@ -16425,7 +17465,7 @@
       </p:sp>
       <p:graphicFrame>
         <p:nvGraphicFramePr>
-          <p:cNvPr id="47" name="Table 0"/>
+          <p:cNvPr id="50" name="Table 0"/>
           <p:cNvGraphicFramePr>
             <a:graphicFrameLocks noGrp="1"/>
           </p:cNvGraphicFramePr>
@@ -17737,7 +18777,7 @@
             <a:pPr algn="ctr"/>
             <a:fld id="{F7021451-1387-4CA6-816F-3879F97B5CBC}" type="slidenum">
               <a:rPr b="1" lang="en-US"/>
-              <a:t>46</a:t>
+              <a:t>49</a:t>
             </a:fld>
             <a:endParaRPr lang="en-US"/>
           </a:p>
@@ -17751,9 +18791,9 @@
 </p:sld>
 </file>
 
-<file path=ppt/slides/slide47.xml><?xml version="1.0" encoding="utf-8"?>
+<file path=ppt/slides/slide5.xml><?xml version="1.0" encoding="utf-8"?>
 <p:sld xmlns:a="http://schemas.openxmlformats.org/drawingml/2006/main" xmlns:r="http://schemas.openxmlformats.org/officeDocument/2006/relationships" xmlns:p="http://schemas.openxmlformats.org/presentationml/2006/main">
-  <p:cSld name="Slide 47">
+  <p:cSld name="Slide 5">
     <p:spTree>
       <p:nvGrpSpPr>
         <p:cNvPr id="1" name=""/>
@@ -17801,6 +18841,225 @@
                 <a:ea typeface="Calibri" pitchFamily="34" charset="-122"/>
                 <a:cs typeface="Calibri" pitchFamily="34" charset="-120"/>
               </a:rPr>
+              <a:t>HOMEWORK CORRECTION</a:t>
+            </a:r>
+            <a:endParaRPr lang="en-US" sz="1400" dirty="0"/>
+          </a:p>
+        </p:txBody>
+      </p:sp>
+      <p:pic>
+        <p:nvPicPr>
+          <p:cNvPr id="3" name="Image 0" descr="/home/claude/f4/img/minesec_sheet.png">    </p:cNvPr>
+          <p:cNvPicPr>
+            <a:picLocks noChangeAspect="1"/>
+          </p:cNvPicPr>
+          <p:nvPr/>
+        </p:nvPicPr>
+        <p:blipFill>
+          <a:blip r:embed="rId1"/>
+          <a:stretch>
+            <a:fillRect/>
+          </a:stretch>
+        </p:blipFill>
+        <p:spPr>
+          <a:xfrm>
+            <a:off x="0" y="658368"/>
+            <a:ext cx="5120640" cy="5833872"/>
+          </a:xfrm>
+          <a:prstGeom prst="rect">
+            <a:avLst/>
+          </a:prstGeom>
+        </p:spPr>
+      </p:pic>
+      <p:sp>
+        <p:nvSpPr>
+          <p:cNvPr id="4" name="Text 1"/>
+          <p:cNvSpPr/>
+          <p:nvPr/>
+        </p:nvSpPr>
+        <p:spPr>
+          <a:xfrm>
+            <a:off x="5349240" y="1005840"/>
+            <a:ext cx="6522415" cy="731520"/>
+          </a:xfrm>
+          <a:prstGeom prst="rect">
+            <a:avLst/>
+          </a:prstGeom>
+          <a:noFill/>
+          <a:ln/>
+        </p:spPr>
+        <p:txBody>
+          <a:bodyPr wrap="square" lIns="0" tIns="0" rIns="0" bIns="0" rtlCol="0" anchor="ctr">
+            <a:normAutofit/>
+          </a:bodyPr>
+          <a:lstStyle/>
+          <a:p>
+            <a:pPr algn="ctr" indent="0" marL="0">
+              <a:buNone/>
+            </a:pPr>
+            <a:r>
+              <a:rPr lang="en-US" sz="3600" b="1" dirty="0">
+                <a:solidFill>
+                  <a:srgbClr val="990011"/>
+                </a:solidFill>
+                <a:latin typeface="Times New Roman" pitchFamily="34" charset="0"/>
+                <a:ea typeface="Times New Roman" pitchFamily="34" charset="-122"/>
+                <a:cs typeface="Times New Roman" pitchFamily="34" charset="-120"/>
+              </a:rPr>
+              <a:t>Correction: Possible Answer</a:t>
+            </a:r>
+            <a:endParaRPr lang="en-US" sz="3600" dirty="0"/>
+          </a:p>
+        </p:txBody>
+      </p:sp>
+      <p:sp>
+        <p:nvSpPr>
+          <p:cNvPr id="5" name="Text 2"/>
+          <p:cNvSpPr/>
+          <p:nvPr/>
+        </p:nvSpPr>
+        <p:spPr>
+          <a:xfrm>
+            <a:off x="5349240" y="1783080"/>
+            <a:ext cx="6522415" cy="4663440"/>
+          </a:xfrm>
+          <a:prstGeom prst="rect">
+            <a:avLst/>
+          </a:prstGeom>
+          <a:noFill/>
+          <a:ln/>
+        </p:spPr>
+        <p:txBody>
+          <a:bodyPr wrap="square" lIns="0" tIns="0" rIns="0" bIns="0" rtlCol="0" anchor="t"/>
+          <a:lstStyle/>
+          <a:p>
+            <a:pPr algn="l" indent="0" marL="0">
+              <a:spcAft>
+                <a:spcPts val="800"/>
+              </a:spcAft>
+              <a:buNone/>
+            </a:pPr>
+            <a:r>
+              <a:rPr lang="en-US" sz="4000" dirty="0">
+                <a:solidFill>
+                  <a:srgbClr val="111111"/>
+                </a:solidFill>
+                <a:latin typeface="Times New Roman" pitchFamily="34" charset="0"/>
+                <a:ea typeface="Times New Roman" pitchFamily="34" charset="-122"/>
+                <a:cs typeface="Times New Roman" pitchFamily="34" charset="-120"/>
+              </a:rPr>
+              <a:t>Examples: the cactus stores water in its thick stem; the acacia has small leaves and long roots; the date palm has deep roots that reach underground water.</a:t>
+            </a:r>
+            <a:endParaRPr lang="en-US" sz="4000" dirty="0"/>
+          </a:p>
+        </p:txBody>
+      </p:sp>
+      <p:sp>
+        <p:nvSpPr>
+          <p:cNvPr id="25" name="Slide Number Placeholder 0"/>
+          <p:cNvSpPr>
+            <a:spLocks noGrp="1"/>
+          </p:cNvSpPr>
+          <p:nvPr>
+            <p:ph type="sldNum" sz="quarter" idx="4294967295"/>
+          </p:nvPr>
+        </p:nvSpPr>
+        <p:spPr>
+          <a:xfrm>
+            <a:off x="27432" y="91440"/>
+            <a:ext cx="585216" cy="475488"/>
+          </a:xfrm>
+          <a:prstGeom prst="rect">
+            <a:avLst/>
+          </a:prstGeom>
+          <a:extLst>
+            <a:ext uri="{C572A759-6A51-4108-AA02-DFA0A04FC94B}">
+              <ma14:wrappingTextBoxFlag xmlns:ma14="http://schemas.microsoft.com/office/mac/drawingml/2011/main" val="0"/>
+            </a:ext>
+          </a:extLst>
+        </p:spPr>
+        <p:txBody>
+          <a:bodyPr/>
+          <a:lstStyle>
+            <a:lvl1pPr>
+              <a:defRPr sz="2000">
+                <a:solidFill>
+                  <a:srgbClr val="FFFFFF"/>
+                </a:solidFill>
+                <a:latin typeface="Calibri"/>
+                <a:ea typeface="Calibri"/>
+                <a:cs typeface="Calibri"/>
+              </a:defRPr>
+            </a:lvl1pPr>
+          </a:lstStyle>
+          <a:p>
+            <a:pPr algn="ctr"/>
+            <a:fld id="{F7021451-1387-4CA6-816F-3879F97B5CBC}" type="slidenum">
+              <a:rPr b="1" lang="en-US"/>
+              <a:t>5</a:t>
+            </a:fld>
+            <a:endParaRPr lang="en-US"/>
+          </a:p>
+        </p:txBody>
+      </p:sp>
+    </p:spTree>
+  </p:cSld>
+  <p:clrMapOvr>
+    <a:masterClrMapping/>
+  </p:clrMapOvr>
+</p:sld>
+</file>
+
+<file path=ppt/slides/slide50.xml><?xml version="1.0" encoding="utf-8"?>
+<p:sld xmlns:a="http://schemas.openxmlformats.org/drawingml/2006/main" xmlns:r="http://schemas.openxmlformats.org/officeDocument/2006/relationships" xmlns:p="http://schemas.openxmlformats.org/presentationml/2006/main">
+  <p:cSld name="Slide 50">
+    <p:spTree>
+      <p:nvGrpSpPr>
+        <p:cNvPr id="1" name=""/>
+        <p:cNvGrpSpPr/>
+        <p:nvPr/>
+      </p:nvGrpSpPr>
+      <p:grpSpPr>
+        <a:xfrm>
+          <a:off x="0" y="0"/>
+          <a:ext cx="0" cy="0"/>
+          <a:chOff x="0" y="0"/>
+          <a:chExt cx="0" cy="0"/>
+        </a:xfrm>
+      </p:grpSpPr>
+      <p:sp>
+        <p:nvSpPr>
+          <p:cNvPr id="2" name="Text 0"/>
+          <p:cNvSpPr/>
+          <p:nvPr/>
+        </p:nvSpPr>
+        <p:spPr>
+          <a:xfrm>
+            <a:off x="457200" y="713232"/>
+            <a:ext cx="11368735" cy="274320"/>
+          </a:xfrm>
+          <a:prstGeom prst="rect">
+            <a:avLst/>
+          </a:prstGeom>
+          <a:noFill/>
+          <a:ln/>
+        </p:spPr>
+        <p:txBody>
+          <a:bodyPr wrap="square" lIns="0" tIns="0" rIns="0" bIns="0" rtlCol="0" anchor="ctr"/>
+          <a:lstStyle/>
+          <a:p>
+            <a:pPr algn="r" indent="0" marL="0">
+              <a:buNone/>
+            </a:pPr>
+            <a:r>
+              <a:rPr lang="en-US" sz="1400" b="1" dirty="0">
+                <a:solidFill>
+                  <a:srgbClr val="1C3F6E"/>
+                </a:solidFill>
+                <a:latin typeface="Calibri" pitchFamily="34" charset="0"/>
+                <a:ea typeface="Calibri" pitchFamily="34" charset="-122"/>
+                <a:cs typeface="Calibri" pitchFamily="34" charset="-120"/>
+              </a:rPr>
               <a:t>LOGBOOK</a:t>
             </a:r>
             <a:endParaRPr lang="en-US" sz="1400" dirty="0"/>
@@ -17848,7 +19107,7 @@
       </p:sp>
       <p:graphicFrame>
         <p:nvGraphicFramePr>
-          <p:cNvPr id="48" name="Table 0"/>
+          <p:cNvPr id="51" name="Table 0"/>
           <p:cNvGraphicFramePr>
             <a:graphicFrameLocks noGrp="1"/>
           </p:cNvGraphicFramePr>
@@ -18470,7 +19729,7 @@
             <a:pPr algn="ctr"/>
             <a:fld id="{F7021451-1387-4CA6-816F-3879F97B5CBC}" type="slidenum">
               <a:rPr b="1" lang="en-US"/>
-              <a:t>47</a:t>
+              <a:t>50</a:t>
             </a:fld>
             <a:endParaRPr lang="en-US"/>
           </a:p>
@@ -18484,9 +19743,9 @@
 </p:sld>
 </file>
 
-<file path=ppt/slides/slide48.xml><?xml version="1.0" encoding="utf-8"?>
+<file path=ppt/slides/slide51.xml><?xml version="1.0" encoding="utf-8"?>
 <p:sld xmlns:a="http://schemas.openxmlformats.org/drawingml/2006/main" xmlns:r="http://schemas.openxmlformats.org/officeDocument/2006/relationships" xmlns:p="http://schemas.openxmlformats.org/presentationml/2006/main">
-  <p:cSld name="Slide 48">
+  <p:cSld name="Slide 51">
     <p:spTree>
       <p:nvGrpSpPr>
         <p:cNvPr id="1" name=""/>
@@ -18581,7 +19840,7 @@
       </p:sp>
       <p:graphicFrame>
         <p:nvGraphicFramePr>
-          <p:cNvPr id="49" name="Table 0"/>
+          <p:cNvPr id="52" name="Table 0"/>
           <p:cNvGraphicFramePr>
             <a:graphicFrameLocks noGrp="1"/>
           </p:cNvGraphicFramePr>
@@ -19341,7 +20600,7 @@
             <a:pPr algn="ctr"/>
             <a:fld id="{F7021451-1387-4CA6-816F-3879F97B5CBC}" type="slidenum">
               <a:rPr b="1" lang="en-US"/>
-              <a:t>48</a:t>
+              <a:t>51</a:t>
             </a:fld>
             <a:endParaRPr lang="en-US"/>
           </a:p>
@@ -19355,9 +20614,9 @@
 </p:sld>
 </file>
 
-<file path=ppt/slides/slide49.xml><?xml version="1.0" encoding="utf-8"?>
+<file path=ppt/slides/slide52.xml><?xml version="1.0" encoding="utf-8"?>
 <p:sld xmlns:a="http://schemas.openxmlformats.org/drawingml/2006/main" xmlns:r="http://schemas.openxmlformats.org/officeDocument/2006/relationships" xmlns:p="http://schemas.openxmlformats.org/presentationml/2006/main">
-  <p:cSld name="Slide 49">
+  <p:cSld name="Slide 52">
     <p:spTree>
       <p:nvGrpSpPr>
         <p:cNvPr id="1" name=""/>
@@ -19428,7 +20687,7 @@
         <p:spPr>
           <a:xfrm>
             <a:off x="0" y="658368"/>
-            <a:ext cx="2468880" cy="5833872"/>
+            <a:ext cx="5120640" cy="5833872"/>
           </a:xfrm>
           <a:prstGeom prst="rect">
             <a:avLst/>
@@ -19443,8 +20702,8 @@
         </p:nvSpPr>
         <p:spPr>
           <a:xfrm>
-            <a:off x="2697480" y="1005840"/>
-            <a:ext cx="9174175" cy="731520"/>
+            <a:off x="5349240" y="1005840"/>
+            <a:ext cx="6522415" cy="731520"/>
           </a:xfrm>
           <a:prstGeom prst="rect">
             <a:avLst/>
@@ -19484,8 +20743,8 @@
         </p:nvSpPr>
         <p:spPr>
           <a:xfrm>
-            <a:off x="2697480" y="1783080"/>
-            <a:ext cx="9174175" cy="4663440"/>
+            <a:off x="5349240" y="1783080"/>
+            <a:ext cx="6522415" cy="4663440"/>
           </a:xfrm>
           <a:prstGeom prst="rect">
             <a:avLst/>
@@ -19534,7 +20793,7 @@
                 <a:ea typeface="Calibri" pitchFamily="34" charset="-122"/>
                 <a:cs typeface="Calibri" pitchFamily="34" charset="-120"/>
               </a:rPr>
-              <a:t>Without the projector (Activity 1): ask learners to imagine the Sahara after the Sahel.</a:t>
+              <a:t>Without the projector (Activity 1): describe plants in the Far North.</a:t>
             </a:r>
             <a:endParaRPr lang="en-US" sz="2000" dirty="0"/>
           </a:p>
@@ -19555,7 +20814,7 @@
                 <a:ea typeface="Calibri" pitchFamily="34" charset="-122"/>
                 <a:cs typeface="Calibri" pitchFamily="34" charset="-120"/>
               </a:rPr>
-              <a:t>Without the projector (Activity 2): bring a cactus or an aloe plant to class.</a:t>
+              <a:t>Without the projector (Activity 2): show a cactus.</a:t>
             </a:r>
             <a:endParaRPr lang="en-US" sz="2000" dirty="0"/>
           </a:p>
@@ -19576,7 +20835,7 @@
                 <a:ea typeface="Calibri" pitchFamily="34" charset="-122"/>
                 <a:cs typeface="Calibri" pitchFamily="34" charset="-120"/>
               </a:rPr>
-              <a:t>Without the projector (Activity 3): draw a small tree with very long roots on the board.</a:t>
+              <a:t>Without the projector (Activity 3): draw long roots.</a:t>
             </a:r>
             <a:endParaRPr lang="en-US" sz="2000" dirty="0"/>
           </a:p>
@@ -19597,7 +20856,7 @@
                 <a:ea typeface="Calibri" pitchFamily="34" charset="-122"/>
                 <a:cs typeface="Calibri" pitchFamily="34" charset="-120"/>
               </a:rPr>
-              <a:t>Without the projector (Activity 4): describe a pot of salty water left in the sun.</a:t>
+              <a:t>Without the projector (Activity 4): taste salty water.</a:t>
             </a:r>
             <a:endParaRPr lang="en-US" sz="2000" dirty="0"/>
           </a:p>
@@ -19618,7 +20877,7 @@
                 <a:ea typeface="Calibri" pitchFamily="34" charset="-122"/>
                 <a:cs typeface="Calibri" pitchFamily="34" charset="-120"/>
               </a:rPr>
-              <a:t>Without the projector (Activity 5): compare with the dry-season gardens along the Benue.</a:t>
+              <a:t>Without the projector (Activity 5): show the Nile on a map.</a:t>
             </a:r>
             <a:endParaRPr lang="en-US" sz="2000" dirty="0"/>
           </a:p>
@@ -19666,7 +20925,7 @@
             <a:pPr algn="ctr"/>
             <a:fld id="{F7021451-1387-4CA6-816F-3879F97B5CBC}" type="slidenum">
               <a:rPr b="1" lang="en-US"/>
-              <a:t>49</a:t>
+              <a:t>52</a:t>
             </a:fld>
             <a:endParaRPr lang="en-US"/>
           </a:p>
@@ -19680,9 +20939,9 @@
 </p:sld>
 </file>
 
-<file path=ppt/slides/slide5.xml><?xml version="1.0" encoding="utf-8"?>
+<file path=ppt/slides/slide53.xml><?xml version="1.0" encoding="utf-8"?>
 <p:sld xmlns:a="http://schemas.openxmlformats.org/drawingml/2006/main" xmlns:r="http://schemas.openxmlformats.org/officeDocument/2006/relationships" xmlns:p="http://schemas.openxmlformats.org/presentationml/2006/main">
-  <p:cSld name="Slide 5">
+  <p:cSld name="Slide 53">
     <p:spTree>
       <p:nvGrpSpPr>
         <p:cNvPr id="1" name=""/>
@@ -19730,7 +20989,7 @@
                 <a:ea typeface="Calibri" pitchFamily="34" charset="-122"/>
                 <a:cs typeface="Calibri" pitchFamily="34" charset="-120"/>
               </a:rPr>
-              <a:t>HOMEWORK CORRECTION</a:t>
+              <a:t>REFERENCES</a:t>
             </a:r>
             <a:endParaRPr lang="en-US" sz="1400" dirty="0"/>
           </a:p>
@@ -19753,7 +21012,7 @@
         <p:spPr>
           <a:xfrm>
             <a:off x="0" y="658368"/>
-            <a:ext cx="5120640" cy="5833872"/>
+            <a:ext cx="3840480" cy="5833872"/>
           </a:xfrm>
           <a:prstGeom prst="rect">
             <a:avLst/>
@@ -19768,8 +21027,8 @@
         </p:nvSpPr>
         <p:spPr>
           <a:xfrm>
-            <a:off x="5349240" y="1005840"/>
-            <a:ext cx="6522415" cy="731520"/>
+            <a:off x="4069080" y="1005840"/>
+            <a:ext cx="7802575" cy="731520"/>
           </a:xfrm>
           <a:prstGeom prst="rect">
             <a:avLst/>
@@ -19795,7 +21054,7 @@
                 <a:ea typeface="Times New Roman" pitchFamily="34" charset="-122"/>
                 <a:cs typeface="Times New Roman" pitchFamily="34" charset="-120"/>
               </a:rPr>
-              <a:t>Correction: Possible Answer</a:t>
+              <a:t>References</a:t>
             </a:r>
             <a:endParaRPr lang="en-US" sz="3600" dirty="0"/>
           </a:p>
@@ -19809,8 +21068,8 @@
         </p:nvSpPr>
         <p:spPr>
           <a:xfrm>
-            <a:off x="5349240" y="1783080"/>
-            <a:ext cx="6522415" cy="4663440"/>
+            <a:off x="4069080" y="1783080"/>
+            <a:ext cx="7802575" cy="4663440"/>
           </a:xfrm>
           <a:prstGeom prst="rect">
             <a:avLst/>
@@ -19822,24 +21081,151 @@
           <a:bodyPr wrap="square" lIns="0" tIns="0" rIns="0" bIns="0" rtlCol="0" anchor="t"/>
           <a:lstStyle/>
           <a:p>
-            <a:pPr algn="l" indent="0" marL="0">
+            <a:pPr algn="l" marL="342900" indent="-342900">
               <a:spcAft>
                 <a:spcPts val="800"/>
               </a:spcAft>
-              <a:buNone/>
+              <a:buSzPct val="100000"/>
+              <a:buChar char="•"/>
             </a:pPr>
             <a:r>
-              <a:rPr lang="en-US" sz="4000" dirty="0">
+              <a:rPr lang="en-US" sz="1800" dirty="0">
                 <a:solidFill>
                   <a:srgbClr val="111111"/>
                 </a:solidFill>
-                <a:latin typeface="Times New Roman" pitchFamily="34" charset="0"/>
-                <a:ea typeface="Times New Roman" pitchFamily="34" charset="-122"/>
-                <a:cs typeface="Times New Roman" pitchFamily="34" charset="-120"/>
+                <a:latin typeface="Calibri" pitchFamily="34" charset="0"/>
+                <a:ea typeface="Calibri" pitchFamily="34" charset="-122"/>
+                <a:cs typeface="Calibri" pitchFamily="34" charset="-120"/>
               </a:rPr>
-              <a:t>Examples: the cactus stores water in its thick stem; the acacia has small leaves and long roots; the date palm has deep roots that reach underground water.</a:t>
-            </a:r>
-            <a:endParaRPr lang="en-US" sz="4000" dirty="0"/>
+              <a:t>Harmonised Progression Sheet, Economic Geography (5051), Form 2.</a:t>
+            </a:r>
+            <a:endParaRPr lang="en-US" sz="1800" dirty="0"/>
+          </a:p>
+          <a:p>
+            <a:pPr algn="l" marL="342900" indent="-342900">
+              <a:spcAft>
+                <a:spcPts val="800"/>
+              </a:spcAft>
+              <a:buSzPct val="100000"/>
+              <a:buChar char="•"/>
+            </a:pPr>
+            <a:r>
+              <a:rPr lang="en-US" sz="1800" dirty="0">
+                <a:solidFill>
+                  <a:srgbClr val="111111"/>
+                </a:solidFill>
+                <a:latin typeface="Calibri" pitchFamily="34" charset="0"/>
+                <a:ea typeface="Calibri" pitchFamily="34" charset="-122"/>
+                <a:cs typeface="Calibri" pitchFamily="34" charset="-120"/>
+              </a:rPr>
+              <a:t>Class textbook: The major biomes of the world (hot deserts).</a:t>
+            </a:r>
+            <a:endParaRPr lang="en-US" sz="1800" dirty="0"/>
+          </a:p>
+          <a:p>
+            <a:pPr algn="l" marL="342900" indent="-342900">
+              <a:spcAft>
+                <a:spcPts val="800"/>
+              </a:spcAft>
+              <a:buSzPct val="100000"/>
+              <a:buChar char="•"/>
+            </a:pPr>
+            <a:r>
+              <a:rPr lang="en-US" sz="1800" dirty="0">
+                <a:solidFill>
+                  <a:srgbClr val="111111"/>
+                </a:solidFill>
+                <a:latin typeface="Calibri" pitchFamily="34" charset="0"/>
+                <a:ea typeface="Calibri" pitchFamily="34" charset="-122"/>
+                <a:cs typeface="Calibri" pitchFamily="34" charset="-120"/>
+              </a:rPr>
+              <a:t>Photo, Activity 1: “Saguaro and teddy bear cholla with mountains in background” by Martin LaBar, CC BY-NC 2.0, via Flickr (https://www.flickr.com/photos/32454422@N00/443523984)</a:t>
+            </a:r>
+            <a:endParaRPr lang="en-US" sz="1800" dirty="0"/>
+          </a:p>
+          <a:p>
+            <a:pPr algn="l" marL="342900" indent="-342900">
+              <a:spcAft>
+                <a:spcPts val="800"/>
+              </a:spcAft>
+              <a:buSzPct val="100000"/>
+              <a:buChar char="•"/>
+            </a:pPr>
+            <a:r>
+              <a:rPr lang="en-US" sz="1800" dirty="0">
+                <a:solidFill>
+                  <a:srgbClr val="111111"/>
+                </a:solidFill>
+                <a:latin typeface="Calibri" pitchFamily="34" charset="0"/>
+                <a:ea typeface="Calibri" pitchFamily="34" charset="-122"/>
+                <a:cs typeface="Calibri" pitchFamily="34" charset="-120"/>
+              </a:rPr>
+              <a:t>Photo, Activity 2: “Crested Saguaro” by CEBImagery.com, CC BY-NC 2.0, via Flickr (https://www.flickr.com/photos/53098051@N02/5626437842)</a:t>
+            </a:r>
+            <a:endParaRPr lang="en-US" sz="1800" dirty="0"/>
+          </a:p>
+          <a:p>
+            <a:pPr algn="l" marL="342900" indent="-342900">
+              <a:spcAft>
+                <a:spcPts val="800"/>
+              </a:spcAft>
+              <a:buSzPct val="100000"/>
+              <a:buChar char="•"/>
+            </a:pPr>
+            <a:r>
+              <a:rPr lang="en-US" sz="1800" dirty="0">
+                <a:solidFill>
+                  <a:srgbClr val="111111"/>
+                </a:solidFill>
+                <a:latin typeface="Calibri" pitchFamily="34" charset="0"/>
+                <a:ea typeface="Calibri" pitchFamily="34" charset="-122"/>
+                <a:cs typeface="Calibri" pitchFamily="34" charset="-120"/>
+              </a:rPr>
+              <a:t>Photo, Activity 4: “Salt” by Phillie Casablanca, CC BY 2.0, via Flickr (https://www.flickr.com/photos/19451080@N00/2052715618)</a:t>
+            </a:r>
+            <a:endParaRPr lang="en-US" sz="1800" dirty="0"/>
+          </a:p>
+          <a:p>
+            <a:pPr algn="l" marL="342900" indent="-342900">
+              <a:spcAft>
+                <a:spcPts val="800"/>
+              </a:spcAft>
+              <a:buSzPct val="100000"/>
+              <a:buChar char="•"/>
+            </a:pPr>
+            <a:r>
+              <a:rPr lang="en-US" sz="1800" dirty="0">
+                <a:solidFill>
+                  <a:srgbClr val="111111"/>
+                </a:solidFill>
+                <a:latin typeface="Calibri" pitchFamily="34" charset="0"/>
+                <a:ea typeface="Calibri" pitchFamily="34" charset="-122"/>
+                <a:cs typeface="Calibri" pitchFamily="34" charset="-120"/>
+              </a:rPr>
+              <a:t>Photo, Activity 5: “View from the train - Arriving to Luxor from Aswan by train” by Jorge Lascar, CC BY 2.0, via Flickr (https://www.flickr.com/photos/8721758@N06/14075081580)</a:t>
+            </a:r>
+            <a:endParaRPr lang="en-US" sz="1800" dirty="0"/>
+          </a:p>
+          <a:p>
+            <a:pPr algn="l" marL="342900" indent="-342900">
+              <a:spcAft>
+                <a:spcPts val="800"/>
+              </a:spcAft>
+              <a:buSzPct val="100000"/>
+              <a:buChar char="•"/>
+            </a:pPr>
+            <a:r>
+              <a:rPr lang="en-US" sz="1800" dirty="0">
+                <a:solidFill>
+                  <a:srgbClr val="111111"/>
+                </a:solidFill>
+                <a:latin typeface="Calibri" pitchFamily="34" charset="0"/>
+                <a:ea typeface="Calibri" pitchFamily="34" charset="-122"/>
+                <a:cs typeface="Calibri" pitchFamily="34" charset="-120"/>
+              </a:rPr>
+              <a:t>Diagrams and animations: drawn for this lesson (Geography Department).</a:t>
+            </a:r>
+            <a:endParaRPr lang="en-US" sz="1800" dirty="0"/>
           </a:p>
         </p:txBody>
       </p:sp>
@@ -19885,353 +21271,7 @@
             <a:pPr algn="ctr"/>
             <a:fld id="{F7021451-1387-4CA6-816F-3879F97B5CBC}" type="slidenum">
               <a:rPr b="1" lang="en-US"/>
-              <a:t>5</a:t>
-            </a:fld>
-            <a:endParaRPr lang="en-US"/>
-          </a:p>
-        </p:txBody>
-      </p:sp>
-    </p:spTree>
-  </p:cSld>
-  <p:clrMapOvr>
-    <a:masterClrMapping/>
-  </p:clrMapOvr>
-</p:sld>
-</file>
-
-<file path=ppt/slides/slide50.xml><?xml version="1.0" encoding="utf-8"?>
-<p:sld xmlns:a="http://schemas.openxmlformats.org/drawingml/2006/main" xmlns:r="http://schemas.openxmlformats.org/officeDocument/2006/relationships" xmlns:p="http://schemas.openxmlformats.org/presentationml/2006/main">
-  <p:cSld name="Slide 50">
-    <p:spTree>
-      <p:nvGrpSpPr>
-        <p:cNvPr id="1" name=""/>
-        <p:cNvGrpSpPr/>
-        <p:nvPr/>
-      </p:nvGrpSpPr>
-      <p:grpSpPr>
-        <a:xfrm>
-          <a:off x="0" y="0"/>
-          <a:ext cx="0" cy="0"/>
-          <a:chOff x="0" y="0"/>
-          <a:chExt cx="0" cy="0"/>
-        </a:xfrm>
-      </p:grpSpPr>
-      <p:sp>
-        <p:nvSpPr>
-          <p:cNvPr id="2" name="Text 0"/>
-          <p:cNvSpPr/>
-          <p:nvPr/>
-        </p:nvSpPr>
-        <p:spPr>
-          <a:xfrm>
-            <a:off x="457200" y="713232"/>
-            <a:ext cx="11368735" cy="274320"/>
-          </a:xfrm>
-          <a:prstGeom prst="rect">
-            <a:avLst/>
-          </a:prstGeom>
-          <a:noFill/>
-          <a:ln/>
-        </p:spPr>
-        <p:txBody>
-          <a:bodyPr wrap="square" lIns="0" tIns="0" rIns="0" bIns="0" rtlCol="0" anchor="ctr"/>
-          <a:lstStyle/>
-          <a:p>
-            <a:pPr algn="r" indent="0" marL="0">
-              <a:buNone/>
-            </a:pPr>
-            <a:r>
-              <a:rPr lang="en-US" sz="1400" b="1" dirty="0">
-                <a:solidFill>
-                  <a:srgbClr val="1C3F6E"/>
-                </a:solidFill>
-                <a:latin typeface="Calibri" pitchFamily="34" charset="0"/>
-                <a:ea typeface="Calibri" pitchFamily="34" charset="-122"/>
-                <a:cs typeface="Calibri" pitchFamily="34" charset="-120"/>
-              </a:rPr>
-              <a:t>REFERENCES</a:t>
-            </a:r>
-            <a:endParaRPr lang="en-US" sz="1400" dirty="0"/>
-          </a:p>
-        </p:txBody>
-      </p:sp>
-      <p:pic>
-        <p:nvPicPr>
-          <p:cNvPr id="3" name="Image 0" descr="/home/claude/f4/img/minesec_sheet.png">    </p:cNvPr>
-          <p:cNvPicPr>
-            <a:picLocks noChangeAspect="1"/>
-          </p:cNvPicPr>
-          <p:nvPr/>
-        </p:nvPicPr>
-        <p:blipFill>
-          <a:blip r:embed="rId1"/>
-          <a:stretch>
-            <a:fillRect/>
-          </a:stretch>
-        </p:blipFill>
-        <p:spPr>
-          <a:xfrm>
-            <a:off x="0" y="658368"/>
-            <a:ext cx="3840480" cy="5833872"/>
-          </a:xfrm>
-          <a:prstGeom prst="rect">
-            <a:avLst/>
-          </a:prstGeom>
-        </p:spPr>
-      </p:pic>
-      <p:sp>
-        <p:nvSpPr>
-          <p:cNvPr id="4" name="Text 1"/>
-          <p:cNvSpPr/>
-          <p:nvPr/>
-        </p:nvSpPr>
-        <p:spPr>
-          <a:xfrm>
-            <a:off x="4069080" y="1005840"/>
-            <a:ext cx="7802575" cy="731520"/>
-          </a:xfrm>
-          <a:prstGeom prst="rect">
-            <a:avLst/>
-          </a:prstGeom>
-          <a:noFill/>
-          <a:ln/>
-        </p:spPr>
-        <p:txBody>
-          <a:bodyPr wrap="square" lIns="0" tIns="0" rIns="0" bIns="0" rtlCol="0" anchor="ctr">
-            <a:normAutofit/>
-          </a:bodyPr>
-          <a:lstStyle/>
-          <a:p>
-            <a:pPr algn="ctr" indent="0" marL="0">
-              <a:buNone/>
-            </a:pPr>
-            <a:r>
-              <a:rPr lang="en-US" sz="3600" b="1" dirty="0">
-                <a:solidFill>
-                  <a:srgbClr val="990011"/>
-                </a:solidFill>
-                <a:latin typeface="Times New Roman" pitchFamily="34" charset="0"/>
-                <a:ea typeface="Times New Roman" pitchFamily="34" charset="-122"/>
-                <a:cs typeface="Times New Roman" pitchFamily="34" charset="-120"/>
-              </a:rPr>
-              <a:t>References</a:t>
-            </a:r>
-            <a:endParaRPr lang="en-US" sz="3600" dirty="0"/>
-          </a:p>
-        </p:txBody>
-      </p:sp>
-      <p:sp>
-        <p:nvSpPr>
-          <p:cNvPr id="5" name="Text 2"/>
-          <p:cNvSpPr/>
-          <p:nvPr/>
-        </p:nvSpPr>
-        <p:spPr>
-          <a:xfrm>
-            <a:off x="4069080" y="1783080"/>
-            <a:ext cx="7802575" cy="4663440"/>
-          </a:xfrm>
-          <a:prstGeom prst="rect">
-            <a:avLst/>
-          </a:prstGeom>
-          <a:noFill/>
-          <a:ln/>
-        </p:spPr>
-        <p:txBody>
-          <a:bodyPr wrap="square" lIns="0" tIns="0" rIns="0" bIns="0" rtlCol="0" anchor="t"/>
-          <a:lstStyle/>
-          <a:p>
-            <a:pPr algn="l" marL="342900" indent="-342900">
-              <a:spcAft>
-                <a:spcPts val="800"/>
-              </a:spcAft>
-              <a:buSzPct val="100000"/>
-              <a:buChar char="•"/>
-            </a:pPr>
-            <a:r>
-              <a:rPr lang="en-US" sz="1800" dirty="0">
-                <a:solidFill>
-                  <a:srgbClr val="111111"/>
-                </a:solidFill>
-                <a:latin typeface="Calibri" pitchFamily="34" charset="0"/>
-                <a:ea typeface="Calibri" pitchFamily="34" charset="-122"/>
-                <a:cs typeface="Calibri" pitchFamily="34" charset="-120"/>
-              </a:rPr>
-              <a:t>Harmonised Progression Sheet, Economic Geography (5051), Form 2.</a:t>
-            </a:r>
-            <a:endParaRPr lang="en-US" sz="1800" dirty="0"/>
-          </a:p>
-          <a:p>
-            <a:pPr algn="l" marL="342900" indent="-342900">
-              <a:spcAft>
-                <a:spcPts val="800"/>
-              </a:spcAft>
-              <a:buSzPct val="100000"/>
-              <a:buChar char="•"/>
-            </a:pPr>
-            <a:r>
-              <a:rPr lang="en-US" sz="1800" dirty="0">
-                <a:solidFill>
-                  <a:srgbClr val="111111"/>
-                </a:solidFill>
-                <a:latin typeface="Calibri" pitchFamily="34" charset="0"/>
-                <a:ea typeface="Calibri" pitchFamily="34" charset="-122"/>
-                <a:cs typeface="Calibri" pitchFamily="34" charset="-120"/>
-              </a:rPr>
-              <a:t>Class textbook: The major biomes of the world (hot deserts).</a:t>
-            </a:r>
-            <a:endParaRPr lang="en-US" sz="1800" dirty="0"/>
-          </a:p>
-          <a:p>
-            <a:pPr algn="l" marL="342900" indent="-342900">
-              <a:spcAft>
-                <a:spcPts val="800"/>
-              </a:spcAft>
-              <a:buSzPct val="100000"/>
-              <a:buChar char="•"/>
-            </a:pPr>
-            <a:r>
-              <a:rPr lang="en-US" sz="1800" dirty="0">
-                <a:solidFill>
-                  <a:srgbClr val="111111"/>
-                </a:solidFill>
-                <a:latin typeface="Calibri" pitchFamily="34" charset="0"/>
-                <a:ea typeface="Calibri" pitchFamily="34" charset="-122"/>
-                <a:cs typeface="Calibri" pitchFamily="34" charset="-120"/>
-              </a:rPr>
-              <a:t>Photo, Activity 1: “Saguaro and teddy bear cholla with mountains in background” by Martin LaBar, CC BY-NC 2.0, via Flickr (https://www.flickr.com/photos/32454422@N00/443523984)</a:t>
-            </a:r>
-            <a:endParaRPr lang="en-US" sz="1800" dirty="0"/>
-          </a:p>
-          <a:p>
-            <a:pPr algn="l" marL="342900" indent="-342900">
-              <a:spcAft>
-                <a:spcPts val="800"/>
-              </a:spcAft>
-              <a:buSzPct val="100000"/>
-              <a:buChar char="•"/>
-            </a:pPr>
-            <a:r>
-              <a:rPr lang="en-US" sz="1800" dirty="0">
-                <a:solidFill>
-                  <a:srgbClr val="111111"/>
-                </a:solidFill>
-                <a:latin typeface="Calibri" pitchFamily="34" charset="0"/>
-                <a:ea typeface="Calibri" pitchFamily="34" charset="-122"/>
-                <a:cs typeface="Calibri" pitchFamily="34" charset="-120"/>
-              </a:rPr>
-              <a:t>Photo, Activity 2: “Crested Saguaro” by CEBImagery.com, CC BY-NC 2.0, via Flickr (https://www.flickr.com/photos/53098051@N02/5626437842)</a:t>
-            </a:r>
-            <a:endParaRPr lang="en-US" sz="1800" dirty="0"/>
-          </a:p>
-          <a:p>
-            <a:pPr algn="l" marL="342900" indent="-342900">
-              <a:spcAft>
-                <a:spcPts val="800"/>
-              </a:spcAft>
-              <a:buSzPct val="100000"/>
-              <a:buChar char="•"/>
-            </a:pPr>
-            <a:r>
-              <a:rPr lang="en-US" sz="1800" dirty="0">
-                <a:solidFill>
-                  <a:srgbClr val="111111"/>
-                </a:solidFill>
-                <a:latin typeface="Calibri" pitchFamily="34" charset="0"/>
-                <a:ea typeface="Calibri" pitchFamily="34" charset="-122"/>
-                <a:cs typeface="Calibri" pitchFamily="34" charset="-120"/>
-              </a:rPr>
-              <a:t>Photo, Activity 4: “Salt” by Phillie Casablanca, CC BY 2.0, via Flickr (https://www.flickr.com/photos/19451080@N00/2052715618)</a:t>
-            </a:r>
-            <a:endParaRPr lang="en-US" sz="1800" dirty="0"/>
-          </a:p>
-          <a:p>
-            <a:pPr algn="l" marL="342900" indent="-342900">
-              <a:spcAft>
-                <a:spcPts val="800"/>
-              </a:spcAft>
-              <a:buSzPct val="100000"/>
-              <a:buChar char="•"/>
-            </a:pPr>
-            <a:r>
-              <a:rPr lang="en-US" sz="1800" dirty="0">
-                <a:solidFill>
-                  <a:srgbClr val="111111"/>
-                </a:solidFill>
-                <a:latin typeface="Calibri" pitchFamily="34" charset="0"/>
-                <a:ea typeface="Calibri" pitchFamily="34" charset="-122"/>
-                <a:cs typeface="Calibri" pitchFamily="34" charset="-120"/>
-              </a:rPr>
-              <a:t>Photo, Activity 5: “View from the train - Arriving to Luxor from Aswan by train” by Jorge Lascar, CC BY 2.0, via Flickr (https://www.flickr.com/photos/8721758@N06/14075081580)</a:t>
-            </a:r>
-            <a:endParaRPr lang="en-US" sz="1800" dirty="0"/>
-          </a:p>
-          <a:p>
-            <a:pPr algn="l" marL="342900" indent="-342900">
-              <a:spcAft>
-                <a:spcPts val="800"/>
-              </a:spcAft>
-              <a:buSzPct val="100000"/>
-              <a:buChar char="•"/>
-            </a:pPr>
-            <a:r>
-              <a:rPr lang="en-US" sz="1800" dirty="0">
-                <a:solidFill>
-                  <a:srgbClr val="111111"/>
-                </a:solidFill>
-                <a:latin typeface="Calibri" pitchFamily="34" charset="0"/>
-                <a:ea typeface="Calibri" pitchFamily="34" charset="-122"/>
-                <a:cs typeface="Calibri" pitchFamily="34" charset="-120"/>
-              </a:rPr>
-              <a:t>Diagrams and animations: drawn for this lesson (Geography Department).</a:t>
-            </a:r>
-            <a:endParaRPr lang="en-US" sz="1800" dirty="0"/>
-          </a:p>
-        </p:txBody>
-      </p:sp>
-      <p:sp>
-        <p:nvSpPr>
-          <p:cNvPr id="25" name="Slide Number Placeholder 0"/>
-          <p:cNvSpPr>
-            <a:spLocks noGrp="1"/>
-          </p:cNvSpPr>
-          <p:nvPr>
-            <p:ph type="sldNum" sz="quarter" idx="4294967295"/>
-          </p:nvPr>
-        </p:nvSpPr>
-        <p:spPr>
-          <a:xfrm>
-            <a:off x="27432" y="91440"/>
-            <a:ext cx="585216" cy="475488"/>
-          </a:xfrm>
-          <a:prstGeom prst="rect">
-            <a:avLst/>
-          </a:prstGeom>
-          <a:extLst>
-            <a:ext uri="{C572A759-6A51-4108-AA02-DFA0A04FC94B}">
-              <ma14:wrappingTextBoxFlag xmlns:ma14="http://schemas.microsoft.com/office/mac/drawingml/2011/main" val="0"/>
-            </a:ext>
-          </a:extLst>
-        </p:spPr>
-        <p:txBody>
-          <a:bodyPr/>
-          <a:lstStyle>
-            <a:lvl1pPr>
-              <a:defRPr sz="2000">
-                <a:solidFill>
-                  <a:srgbClr val="FFFFFF"/>
-                </a:solidFill>
-                <a:latin typeface="Calibri"/>
-                <a:ea typeface="Calibri"/>
-                <a:cs typeface="Calibri"/>
-              </a:defRPr>
-            </a:lvl1pPr>
-          </a:lstStyle>
-          <a:p>
-            <a:pPr algn="ctr"/>
-            <a:fld id="{F7021451-1387-4CA6-816F-3879F97B5CBC}" type="slidenum">
-              <a:rPr b="1" lang="en-US"/>
-              <a:t>50</a:t>
+              <a:t>53</a:t>
             </a:fld>
             <a:endParaRPr lang="en-US"/>
           </a:p>
@@ -21196,7 +22236,7 @@
         <p:spPr>
           <a:xfrm>
             <a:off x="0" y="658368"/>
-            <a:ext cx="5120640" cy="5833872"/>
+            <a:ext cx="2468880" cy="5833872"/>
           </a:xfrm>
           <a:prstGeom prst="rect">
             <a:avLst/>
@@ -21211,8 +22251,8 @@
         </p:nvSpPr>
         <p:spPr>
           <a:xfrm>
-            <a:off x="5349240" y="1005840"/>
-            <a:ext cx="6522415" cy="731520"/>
+            <a:off x="2697480" y="1005840"/>
+            <a:ext cx="9174175" cy="731520"/>
           </a:xfrm>
           <a:prstGeom prst="rect">
             <a:avLst/>
@@ -21252,8 +22292,8 @@
         </p:nvSpPr>
         <p:spPr>
           <a:xfrm>
-            <a:off x="5349240" y="1783080"/>
-            <a:ext cx="6522415" cy="4663440"/>
+            <a:off x="2697480" y="1783080"/>
+            <a:ext cx="9174175" cy="4663440"/>
           </a:xfrm>
           <a:prstGeom prst="rect">
             <a:avLst/>
@@ -21280,7 +22320,7 @@
                 <a:ea typeface="Times New Roman" pitchFamily="34" charset="-122"/>
                 <a:cs typeface="Times New Roman" pitchFamily="34" charset="-120"/>
               </a:rPr>
-              <a:t>Fanta planted a mango tree and a small cactus in front of her house in Garoua. She forgot to water them for three months. In March, the mango tree was dead, but the cactus was still green.</a:t>
+              <a:t>Fanta planted a mango tree and a small cactus in front of her house in Garoua. She forgot to water them for three months. In March, the mango tree was dead, but the cactus was still green. Fanta asks: "How can desert plants live with so little water?"</a:t>
             </a:r>
             <a:endParaRPr lang="en-US" sz="4000" dirty="0"/>
           </a:p>

--- a/lecons/F2T/13_S07_L3_P3_Desert_Soils_Vegetation.pptx
+++ b/lecons/F2T/13_S07_L3_P3_Desert_Soils_Vegetation.pptx
@@ -3458,7 +3458,7 @@
           <a:p>
             <a:r>
               <a:rPr lang="en-US" dirty="0"/>
-              <a:t>Before we start the new lesson, let us correct the homework I gave you at the end of Lesson 3 (Part 2): The Desert Regions: Characteristics (Climate). The question was: Look at a cactus, an acacia or a date palm near your home or in a picture. Write down one way in which it is adapted to lack of water. Take out your exercise books.</a:t>
+              <a:t>Before we start the new lesson, let us correct the homework I gave you at the end of Lesson 3 (Part 2): The Desert Regions: Characteristics (Climate). The question was: Give two ways desert plants save water. Take out your exercise books.</a:t>
             </a:r>
             <a:endParaRPr lang="en-US" dirty="0"/>
           </a:p>
@@ -4162,7 +4162,7 @@
           <a:p>
             <a:r>
               <a:rPr lang="en-US" dirty="0"/>
-              <a:t>For your homework: Imagine you must spend one week in the Sahara. Write down three problems you would face and one way to solve each. We shall correct it at the beginning of our next lesson.</a:t>
+              <a:t>For your homework: Give two problems of people in hot deserts. We shall correct it at the beginning of our next lesson.</a:t>
             </a:r>
             <a:endParaRPr lang="en-US" dirty="0"/>
           </a:p>
@@ -4426,7 +4426,7 @@
           <a:p>
             <a:r>
               <a:rPr lang="en-US" dirty="0"/>
-              <a:t>Here is a good answer. Examples: the cactus stores water in its thick stem; the acacia has small leaves and long roots; the date palm has deep roots that reach underground water. Compare it with your own answer and correct your work in red.</a:t>
+              <a:t>Here is a good answer. Thick stems that store water and small leaves or spines (also long roots). Compare it with your own answer and correct your work in red.</a:t>
             </a:r>
             <a:endParaRPr lang="en-US" dirty="0"/>
           </a:p>
@@ -15068,7 +15068,7 @@
         <p:spPr>
           <a:xfrm>
             <a:off x="0" y="658368"/>
-            <a:ext cx="2468880" cy="5833872"/>
+            <a:ext cx="5120640" cy="5833872"/>
           </a:xfrm>
           <a:prstGeom prst="rect">
             <a:avLst/>
@@ -15083,8 +15083,8 @@
         </p:nvSpPr>
         <p:spPr>
           <a:xfrm>
-            <a:off x="2697480" y="1005840"/>
-            <a:ext cx="9174175" cy="731520"/>
+            <a:off x="5349240" y="1005840"/>
+            <a:ext cx="6522415" cy="731520"/>
           </a:xfrm>
           <a:prstGeom prst="rect">
             <a:avLst/>
@@ -15124,8 +15124,8 @@
         </p:nvSpPr>
         <p:spPr>
           <a:xfrm>
-            <a:off x="2697480" y="1783080"/>
-            <a:ext cx="9174175" cy="4663440"/>
+            <a:off x="5349240" y="1783080"/>
+            <a:ext cx="6522415" cy="4663440"/>
           </a:xfrm>
           <a:prstGeom prst="rect">
             <a:avLst/>
@@ -15172,7 +15172,7 @@
                 <a:ea typeface="Times New Roman" pitchFamily="34" charset="-122"/>
                 <a:cs typeface="Times New Roman" pitchFamily="34" charset="-120"/>
               </a:rPr>
-              <a:t>Look at a cactus, an acacia or a date palm near your home or in a picture. Write down one way in which it is adapted to lack of water.</a:t>
+              <a:t>Give two ways desert plants save water.</a:t>
             </a:r>
             <a:endParaRPr lang="en-US" sz="4000" dirty="0"/>
           </a:p>
@@ -17067,7 +17067,7 @@
                 <a:ea typeface="Times New Roman" pitchFamily="34" charset="-122"/>
                 <a:cs typeface="Times New Roman" pitchFamily="34" charset="-120"/>
               </a:rPr>
-              <a:t>Imagine you must spend one week in the Sahara. Write down three problems you would face and one way to solve each.</a:t>
+              <a:t>Give two problems of people in hot deserts.</a:t>
             </a:r>
             <a:endParaRPr lang="en-US" sz="4000" dirty="0"/>
           </a:p>
@@ -18948,7 +18948,7 @@
                 <a:ea typeface="Times New Roman" pitchFamily="34" charset="-122"/>
                 <a:cs typeface="Times New Roman" pitchFamily="34" charset="-120"/>
               </a:rPr>
-              <a:t>Examples: the cactus stores water in its thick stem; the acacia has small leaves and long roots; the date palm has deep roots that reach underground water.</a:t>
+              <a:t>Thick stems that store water and small leaves or spines (also long roots).</a:t>
             </a:r>
             <a:endParaRPr lang="en-US" sz="4000" dirty="0"/>
           </a:p>
@@ -20226,7 +20226,7 @@
                           <a:ea typeface="Calibri" pitchFamily="34" charset="-122"/>
                           <a:cs typeface="Calibri" pitchFamily="34" charset="-120"/>
                         </a:rPr>
-                        <a:t>Imagine you must spend one week in the Sahara. Write down three problems you would face and one way to solve each.</a:t>
+                        <a:t>Give two problems of people in hot deserts.</a:t>
                       </a:r>
                       <a:endParaRPr lang="en-US" sz="1600" dirty="0">
                         <a:latin typeface="Calibri" charset="0"/>
